--- a/deliverables/htsr_model_zoo_deck/model_zoo_htsr_study.pptx
+++ b/deliverables/htsr_model_zoo_deck/model_zoo_htsr_study.pptx
@@ -2761,7 +2761,7 @@
               <a:buNone/>
             </a:pPr>
             <a:r>
-              <a:rPr lang="en-US" sz="1000" b="1" spc="150" kern="0" dirty="0">
+              <a:rPr lang="en-US" sz="1000" b="1" dirty="0">
                 <a:solidFill>
                   <a:srgbClr val="FDB515"/>
                 </a:solidFill>
@@ -2864,7 +2864,7 @@
                 <a:ea typeface="Aptos" pitchFamily="34" charset="-122"/>
                 <a:cs typeface="Aptos" pitchFamily="34" charset="-120"/>
               </a:rPr>
-              <a:t>Lineage grouping and performance prediction without descriptive metadata</a:t>
+              <a:t>Exploratory audit: weight grouping, base retrieval, and performance controls</a:t>
             </a:r>
             <a:endParaRPr lang="en-US" sz="1700" dirty="0"/>
           </a:p>
@@ -3137,7 +3137,7 @@
                 <a:ea typeface="Aptos Display" pitchFamily="34" charset="-122"/>
                 <a:cs typeface="Aptos Display" pitchFamily="34" charset="-120"/>
               </a:rPr>
-              <a:t>3.04</a:t>
+              <a:t>3.21</a:t>
             </a:r>
             <a:endParaRPr lang="en-US" sz="2700" dirty="0"/>
           </a:p>
@@ -3176,7 +3176,7 @@
                 <a:ea typeface="Aptos" pitchFamily="34" charset="-122"/>
                 <a:cs typeface="Aptos" pitchFamily="34" charset="-120"/>
               </a:rPr>
-              <a:t>modern score error</a:t>
+              <a:t>non-alpha modern MAE</a:t>
             </a:r>
             <a:endParaRPr lang="en-US" sz="1050" dirty="0"/>
           </a:p>
@@ -3215,7 +3215,7 @@
                 <a:ea typeface="Aptos" pitchFamily="34" charset="-122"/>
                 <a:cs typeface="Aptos" pitchFamily="34" charset="-120"/>
               </a:rPr>
-              <a:t>each model tested once</a:t>
+              <a:t>near-group held-out audit</a:t>
             </a:r>
             <a:endParaRPr lang="en-US" sz="840" dirty="0"/>
           </a:p>
@@ -6413,7 +6413,7 @@
                 <a:ea typeface="Aptos" pitchFamily="34" charset="-122"/>
                 <a:cs typeface="Aptos" pitchFamily="34" charset="-120"/>
               </a:rPr>
-              <a:t>Completed run: weight_only_2a5abfeb98dc33d9662c</a:t>
+              <a:t>Exploratory reassessment: reassessment_0063666fd5733b453c38</a:t>
             </a:r>
             <a:endParaRPr lang="en-US" sz="780" dirty="0"/>
           </a:p>
@@ -6557,7 +6557,7 @@
               <a:buNone/>
             </a:pPr>
             <a:r>
-              <a:rPr lang="en-US" sz="900" b="1" spc="110" kern="0" dirty="0">
+              <a:rPr lang="en-US" sz="900" b="1" dirty="0">
                 <a:solidFill>
                   <a:srgbClr val="00693E"/>
                 </a:solidFill>
@@ -6604,7 +6604,7 @@
                 <a:ea typeface="Aptos Display" pitchFamily="34" charset="-122"/>
                 <a:cs typeface="Aptos Display" pitchFamily="34" charset="-120"/>
               </a:rPr>
-              <a:t>Compare the 17 weight-derived groups with three independent label sets</a:t>
+              <a:t>Validate grouping against overlapping, imperfect label views</a:t>
             </a:r>
             <a:endParaRPr lang="en-US" sz="2500" dirty="0"/>
           </a:p>
@@ -6689,7 +6689,7 @@
                 <a:ea typeface="Aptos" pitchFamily="34" charset="-122"/>
                 <a:cs typeface="Aptos" pitchFamily="34" charset="-120"/>
               </a:rPr>
-              <a:t>Sources: weight_only_2a5abfeb98dc33d9662c/lineage_validation_metrics.csv and lineage_cluster_assignments.csv</a:t>
+              <a:t>Sources: parent lineage_validation_metrics.csv; reassessment_0063666fd5733b453c38/all_matrix_cluster_validation.csv</a:t>
             </a:r>
             <a:endParaRPr lang="en-US" sz="660" dirty="0"/>
           </a:p>
@@ -7010,7 +7010,7 @@
                 <a:ea typeface="Aptos" pitchFamily="34" charset="-122"/>
                 <a:cs typeface="Aptos" pitchFamily="34" charset="-120"/>
               </a:rPr>
-              <a:t>Graph roots</a:t>
+              <a:t>Declared roots</a:t>
             </a:r>
             <a:endParaRPr lang="en-US" sz="1050" dirty="0"/>
           </a:p>
@@ -7049,7 +7049,7 @@
                 <a:ea typeface="Aptos" pitchFamily="34" charset="-122"/>
                 <a:cs typeface="Aptos" pitchFamily="34" charset="-120"/>
               </a:rPr>
-              <a:t>5,013 models traced to 529 individual root checkpoints in the provenance graph.</a:t>
+              <a:t>5,013 models linked to 529 graph-component roots; not verified historical ancestry.</a:t>
             </a:r>
             <a:endParaRPr lang="en-US" sz="940" dirty="0"/>
           </a:p>
@@ -7385,7 +7385,7 @@
               <a:buNone/>
             </a:pPr>
             <a:r>
-              <a:rPr lang="en-US" sz="900" b="1" spc="110" kern="0" dirty="0">
+              <a:rPr lang="en-US" sz="900" b="1" dirty="0">
                 <a:solidFill>
                   <a:srgbClr val="002676"/>
                 </a:solidFill>
@@ -7432,7 +7432,7 @@
                 <a:ea typeface="Aptos Display" pitchFamily="34" charset="-122"/>
                 <a:cs typeface="Aptos Display" pitchFamily="34" charset="-120"/>
               </a:rPr>
-              <a:t>Match each model against a fixed list of known base checkpoints</a:t>
+              <a:t>Base matching depends on the comparison and treatment of ties</a:t>
             </a:r>
             <a:endParaRPr lang="en-US" sz="2500" dirty="0"/>
           </a:p>
@@ -7517,7 +7517,7 @@
                 <a:ea typeface="Aptos" pitchFamily="34" charset="-122"/>
                 <a:cs typeface="Aptos" pitchFamily="34" charset="-120"/>
               </a:rPr>
-              <a:t>Sources: weight_only_2a5abfeb98dc33d9662c/lineage_gallery_metrics.csv; reference paper Sec. 5.2 and 5.4</a:t>
+              <a:t>Sources: reassessment_0063666fd5733b453c38/lineage_gallery_metrics.csv; audit/gallery_tie_sensitivity.csv. Trace: arxiv.org/html/2608.07786v1</a:t>
             </a:r>
             <a:endParaRPr lang="en-US" sz="660" dirty="0"/>
           </a:p>
@@ -7564,7 +7564,7 @@
       </p:sp>
       <p:pic>
         <p:nvPicPr>
-          <p:cNvPr id="11" name="Image 0" descr="/scratch/kinshuk/Model-Research/deliverables/htsr_model_zoo_deck/assets/gallery_accuracy.png">    </p:cNvPr>
+          <p:cNvPr id="11" name="Image 0" descr="/scratch/kinshuk/Model-Research/deliverables/htsr_model_zoo_deck/assets/review_gallery.png">    </p:cNvPr>
           <p:cNvPicPr>
             <a:picLocks noChangeAspect="1"/>
           </p:cNvPicPr>
@@ -7578,8 +7578,8 @@
         </p:blipFill>
         <p:spPr>
           <a:xfrm>
-            <a:off x="384048" y="2017575"/>
-            <a:ext cx="6903720" cy="3161177"/>
+            <a:off x="384048" y="1504282"/>
+            <a:ext cx="6903720" cy="3977452"/>
           </a:xfrm>
           <a:prstGeom prst="rect">
             <a:avLst/>
@@ -7673,7 +7673,7 @@
         <p:spPr>
           <a:xfrm>
             <a:off x="9710928" y="1298448"/>
-            <a:ext cx="1508760" cy="438912"/>
+            <a:ext cx="1810512" cy="438912"/>
           </a:xfrm>
           <a:prstGeom prst="rect">
             <a:avLst/>
@@ -7697,7 +7697,7 @@
                 <a:ea typeface="Aptos Display" pitchFamily="34" charset="-122"/>
                 <a:cs typeface="Aptos Display" pitchFamily="34" charset="-120"/>
               </a:rPr>
-              <a:t>3,836</a:t>
+              <a:t>3,802</a:t>
             </a:r>
             <a:endParaRPr lang="en-US" sz="2700" dirty="0"/>
           </a:p>
@@ -7712,7 +7712,7 @@
         <p:spPr>
           <a:xfrm>
             <a:off x="9710928" y="1783080"/>
-            <a:ext cx="1508760" cy="292608"/>
+            <a:ext cx="1810512" cy="292608"/>
           </a:xfrm>
           <a:prstGeom prst="rect">
             <a:avLst/>
@@ -7736,7 +7736,7 @@
                 <a:ea typeface="Aptos" pitchFamily="34" charset="-122"/>
                 <a:cs typeface="Aptos" pitchFamily="34" charset="-120"/>
               </a:rPr>
-              <a:t>models scored</a:t>
+              <a:t>matched known-root queries</a:t>
             </a:r>
             <a:endParaRPr lang="en-US" sz="1050" dirty="0"/>
           </a:p>
@@ -7750,7 +7750,7 @@
         </p:nvSpPr>
         <p:spPr>
           <a:xfrm>
-            <a:off x="7635240" y="2660904"/>
+            <a:off x="7635240" y="2560320"/>
             <a:ext cx="1783080" cy="438912"/>
           </a:xfrm>
           <a:prstGeom prst="rect">
@@ -7769,13 +7769,13 @@
             <a:r>
               <a:rPr lang="en-US" sz="2700" b="1" dirty="0">
                 <a:solidFill>
-                  <a:srgbClr val="00693E"/>
+                  <a:srgbClr val="003B95"/>
                 </a:solidFill>
                 <a:latin typeface="Aptos Display" pitchFamily="34" charset="0"/>
                 <a:ea typeface="Aptos Display" pitchFamily="34" charset="-122"/>
                 <a:cs typeface="Aptos Display" pitchFamily="34" charset="-120"/>
               </a:rPr>
-              <a:t>82.27%</a:t>
+              <a:t>82.30%</a:t>
             </a:r>
             <a:endParaRPr lang="en-US" sz="2700" dirty="0"/>
           </a:p>
@@ -7789,7 +7789,7 @@
         </p:nvSpPr>
         <p:spPr>
           <a:xfrm>
-            <a:off x="7635240" y="3145536"/>
+            <a:off x="7635240" y="3044952"/>
             <a:ext cx="1783080" cy="292608"/>
           </a:xfrm>
           <a:prstGeom prst="rect">
@@ -7814,7 +7814,7 @@
                 <a:ea typeface="Aptos" pitchFamily="34" charset="-122"/>
                 <a:cs typeface="Aptos" pitchFamily="34" charset="-120"/>
               </a:rPr>
-              <a:t>top choice correct</a:t>
+              <a:t>rank top-1</a:t>
             </a:r>
             <a:endParaRPr lang="en-US" sz="1050" dirty="0"/>
           </a:p>
@@ -7828,8 +7828,8 @@
         </p:nvSpPr>
         <p:spPr>
           <a:xfrm>
-            <a:off x="7635240" y="3483864"/>
-            <a:ext cx="1783080" cy="365760"/>
+            <a:off x="9710928" y="2560320"/>
+            <a:ext cx="1810512" cy="438912"/>
           </a:xfrm>
           <a:prstGeom prst="rect">
             <a:avLst/>
@@ -7845,54 +7845,15 @@
               <a:buNone/>
             </a:pPr>
             <a:r>
-              <a:rPr lang="en-US" sz="840" dirty="0">
-                <a:solidFill>
-                  <a:srgbClr val="667085"/>
-                </a:solidFill>
-                <a:latin typeface="Aptos" pitchFamily="34" charset="0"/>
-                <a:ea typeface="Aptos" pitchFamily="34" charset="-122"/>
-                <a:cs typeface="Aptos" pitchFamily="34" charset="-120"/>
-              </a:rPr>
-              <a:t>across all models</a:t>
-            </a:r>
-            <a:endParaRPr lang="en-US" sz="840" dirty="0"/>
-          </a:p>
-        </p:txBody>
-      </p:sp>
-      <p:sp>
-        <p:nvSpPr>
-          <p:cNvPr id="19" name="Text 16"/>
-          <p:cNvSpPr/>
-          <p:nvPr/>
-        </p:nvSpPr>
-        <p:spPr>
-          <a:xfrm>
-            <a:off x="9710928" y="2660904"/>
-            <a:ext cx="1572768" cy="438912"/>
-          </a:xfrm>
-          <a:prstGeom prst="rect">
-            <a:avLst/>
-          </a:prstGeom>
-          <a:noFill/>
-          <a:ln/>
-        </p:spPr>
-        <p:txBody>
-          <a:bodyPr wrap="square" lIns="0" tIns="0" rIns="0" bIns="0" rtlCol="0" anchor="t"/>
-          <a:lstStyle/>
-          <a:p>
-            <a:pPr indent="0" marL="0">
-              <a:buNone/>
-            </a:pPr>
-            <a:r>
               <a:rPr lang="en-US" sz="2700" b="1" dirty="0">
                 <a:solidFill>
-                  <a:srgbClr val="9A6A00"/>
+                  <a:srgbClr val="00693E"/>
                 </a:solidFill>
                 <a:latin typeface="Aptos Display" pitchFamily="34" charset="0"/>
                 <a:ea typeface="Aptos Display" pitchFamily="34" charset="-122"/>
                 <a:cs typeface="Aptos Display" pitchFamily="34" charset="-120"/>
               </a:rPr>
-              <a:t>84.07%</a:t>
+              <a:t>85.19%</a:t>
             </a:r>
             <a:endParaRPr lang="en-US" sz="2700" dirty="0"/>
           </a:p>
@@ -7900,96 +7861,57 @@
       </p:sp>
       <p:sp>
         <p:nvSpPr>
+          <p:cNvPr id="19" name="Text 16"/>
+          <p:cNvSpPr/>
+          <p:nvPr/>
+        </p:nvSpPr>
+        <p:spPr>
+          <a:xfrm>
+            <a:off x="9710928" y="3044952"/>
+            <a:ext cx="1810512" cy="292608"/>
+          </a:xfrm>
+          <a:prstGeom prst="rect">
+            <a:avLst/>
+          </a:prstGeom>
+          <a:noFill/>
+          <a:ln/>
+        </p:spPr>
+        <p:txBody>
+          <a:bodyPr wrap="square" lIns="0" tIns="0" rIns="0" bIns="0" rtlCol="0" anchor="t"/>
+          <a:lstStyle/>
+          <a:p>
+            <a:pPr indent="0" marL="0">
+              <a:buNone/>
+            </a:pPr>
+            <a:r>
+              <a:rPr lang="en-US" sz="1050" b="1" dirty="0">
+                <a:solidFill>
+                  <a:srgbClr val="14213D"/>
+                </a:solidFill>
+                <a:latin typeface="Aptos" pitchFamily="34" charset="0"/>
+                <a:ea typeface="Aptos" pitchFamily="34" charset="-122"/>
+                <a:cs typeface="Aptos" pitchFamily="34" charset="-120"/>
+              </a:rPr>
+              <a:t>Trace top-1</a:t>
+            </a:r>
+            <a:endParaRPr lang="en-US" sz="1050" dirty="0"/>
+          </a:p>
+        </p:txBody>
+      </p:sp>
+      <p:sp>
+        <p:nvSpPr>
           <p:cNvPr id="20" name="Text 17"/>
           <p:cNvSpPr/>
           <p:nvPr/>
         </p:nvSpPr>
         <p:spPr>
           <a:xfrm>
-            <a:off x="9710928" y="3145536"/>
-            <a:ext cx="1572768" cy="292608"/>
-          </a:xfrm>
-          <a:prstGeom prst="rect">
-            <a:avLst/>
-          </a:prstGeom>
-          <a:noFill/>
-          <a:ln/>
-        </p:spPr>
-        <p:txBody>
-          <a:bodyPr wrap="square" lIns="0" tIns="0" rIns="0" bIns="0" rtlCol="0" anchor="t"/>
-          <a:lstStyle/>
-          <a:p>
-            <a:pPr indent="0" marL="0">
-              <a:buNone/>
-            </a:pPr>
-            <a:r>
-              <a:rPr lang="en-US" sz="1050" b="1" dirty="0">
-                <a:solidFill>
-                  <a:srgbClr val="14213D"/>
-                </a:solidFill>
-                <a:latin typeface="Aptos" pitchFamily="34" charset="0"/>
-                <a:ea typeface="Aptos" pitchFamily="34" charset="-122"/>
-                <a:cs typeface="Aptos" pitchFamily="34" charset="-120"/>
-              </a:rPr>
-              <a:t>top choice correct</a:t>
-            </a:r>
-            <a:endParaRPr lang="en-US" sz="1050" dirty="0"/>
-          </a:p>
-        </p:txBody>
-      </p:sp>
-      <p:sp>
-        <p:nvSpPr>
-          <p:cNvPr id="21" name="Text 18"/>
-          <p:cNvSpPr/>
-          <p:nvPr/>
-        </p:nvSpPr>
-        <p:spPr>
-          <a:xfrm>
-            <a:off x="9710928" y="3483864"/>
-            <a:ext cx="1572768" cy="365760"/>
-          </a:xfrm>
-          <a:prstGeom prst="rect">
-            <a:avLst/>
-          </a:prstGeom>
-          <a:noFill/>
-          <a:ln/>
-        </p:spPr>
-        <p:txBody>
-          <a:bodyPr wrap="square" lIns="0" tIns="0" rIns="0" bIns="0" rtlCol="0" anchor="t"/>
-          <a:lstStyle/>
-          <a:p>
-            <a:pPr indent="0" marL="0">
-              <a:buNone/>
-            </a:pPr>
-            <a:r>
-              <a:rPr lang="en-US" sz="840" dirty="0">
-                <a:solidFill>
-                  <a:srgbClr val="667085"/>
-                </a:solidFill>
-                <a:latin typeface="Aptos" pitchFamily="34" charset="0"/>
-                <a:ea typeface="Aptos" pitchFamily="34" charset="-122"/>
-                <a:cs typeface="Aptos" pitchFamily="34" charset="-120"/>
-              </a:rPr>
-              <a:t>each base weighted equally</a:t>
-            </a:r>
-            <a:endParaRPr lang="en-US" sz="840" dirty="0"/>
-          </a:p>
-        </p:txBody>
-      </p:sp>
-      <p:sp>
-        <p:nvSpPr>
-          <p:cNvPr id="22" name="Text 19"/>
-          <p:cNvSpPr/>
-          <p:nvPr/>
-        </p:nvSpPr>
-        <p:spPr>
-          <a:xfrm>
-            <a:off x="7635240" y="3986784"/>
-            <a:ext cx="3675888" cy="932688"/>
+            <a:off x="7635240" y="3685032"/>
+            <a:ext cx="3675888" cy="1097280"/>
           </a:xfrm>
           <a:prstGeom prst="roundRect">
             <a:avLst>
-              <a:gd name="adj" fmla="val 4902"/>
+              <a:gd name="adj" fmla="val 4167"/>
             </a:avLst>
           </a:prstGeom>
           <a:solidFill>
@@ -8009,7 +7931,7 @@
               <a:buNone/>
             </a:pPr>
             <a:r>
-              <a:rPr lang="en-US" sz="1050" b="1" dirty="0">
+              <a:rPr lang="en-US" sz="1000" b="1" dirty="0">
                 <a:solidFill>
                   <a:srgbClr val="14213D"/>
                 </a:solidFill>
@@ -8017,26 +7939,26 @@
                 <a:ea typeface="Aptos" pitchFamily="34" charset="-122"/>
                 <a:cs typeface="Aptos" pitchFamily="34" charset="-120"/>
               </a:rPr>
-              <a:t>The possible answers are fixed before prediction. A model is compared with all 29 available base profiles and the bases are ranked by similarity.</a:t>
-            </a:r>
-            <a:endParaRPr lang="en-US" sz="1050" dirty="0"/>
-          </a:p>
-        </p:txBody>
-      </p:sp>
-      <p:sp>
-        <p:nvSpPr>
-          <p:cNvPr id="23" name="Text 20"/>
-          <p:cNvSpPr/>
-          <p:nvPr/>
-        </p:nvSpPr>
-        <p:spPr>
-          <a:xfrm>
-            <a:off x="7635240" y="5193792"/>
-            <a:ext cx="3675888" cy="658368"/>
+              <a:t>Trace compares weight magnitude through layers, averaging seven role-wise correlations. Its first-choice gain is sensitive to tied candidates; the full and tie-excluded subsets answer different questions.</a:t>
+            </a:r>
+            <a:endParaRPr lang="en-US" sz="1000" dirty="0"/>
+          </a:p>
+        </p:txBody>
+      </p:sp>
+      <p:sp>
+        <p:nvSpPr>
+          <p:cNvPr id="21" name="Text 18"/>
+          <p:cNvSpPr/>
+          <p:nvPr/>
+        </p:nvSpPr>
+        <p:spPr>
+          <a:xfrm>
+            <a:off x="7635240" y="5010912"/>
+            <a:ext cx="3675888" cy="914400"/>
           </a:xfrm>
           <a:prstGeom prst="roundRect">
             <a:avLst>
-              <a:gd name="adj" fmla="val 6944"/>
+              <a:gd name="adj" fmla="val 5000"/>
             </a:avLst>
           </a:prstGeom>
           <a:solidFill>
@@ -8056,7 +7978,7 @@
               <a:buNone/>
             </a:pPr>
             <a:r>
-              <a:rPr lang="en-US" sz="1020" b="1" dirty="0">
+              <a:rPr lang="en-US" sz="980" b="1" dirty="0">
                 <a:solidFill>
                   <a:srgbClr val="B42318"/>
                 </a:solidFill>
@@ -8064,9 +7986,48 @@
                 <a:ea typeface="Aptos" pitchFamily="34" charset="-122"/>
                 <a:cs typeface="Aptos" pitchFamily="34" charset="-120"/>
               </a:rPr>
-              <a:t>A base outside this candidate list cannot be selected. Provenance is opened afterward only to score the ranking.</a:t>
-            </a:r>
-            <a:endParaRPr lang="en-US" sz="1020" dirty="0"/>
+              <a:t>757 other labeled queries have a root absent from the supplied list; 278 have a listed root without usable measurements. These are queries, not additional candidate bases.</a:t>
+            </a:r>
+            <a:endParaRPr lang="en-US" sz="980" dirty="0"/>
+          </a:p>
+        </p:txBody>
+      </p:sp>
+      <p:sp>
+        <p:nvSpPr>
+          <p:cNvPr id="22" name="Text 19"/>
+          <p:cNvSpPr/>
+          <p:nvPr/>
+        </p:nvSpPr>
+        <p:spPr>
+          <a:xfrm>
+            <a:off x="603504" y="5925312"/>
+            <a:ext cx="6620256" cy="384048"/>
+          </a:xfrm>
+          <a:prstGeom prst="rect">
+            <a:avLst/>
+          </a:prstGeom>
+          <a:noFill/>
+          <a:ln/>
+        </p:spPr>
+        <p:txBody>
+          <a:bodyPr wrap="square" lIns="0" tIns="0" rIns="0" bIns="0" rtlCol="0" anchor="t"/>
+          <a:lstStyle/>
+          <a:p>
+            <a:pPr indent="0" marL="0">
+              <a:buNone/>
+            </a:pPr>
+            <a:r>
+              <a:rPr lang="en-US" sz="920" b="1" dirty="0">
+                <a:solidFill>
+                  <a:srgbClr val="B42318"/>
+                </a:solidFill>
+                <a:latin typeface="Aptos" pitchFamily="34" charset="0"/>
+                <a:ea typeface="Aptos" pitchFamily="34" charset="-122"/>
+                <a:cs typeface="Aptos" pitchFamily="34" charset="-120"/>
+              </a:rPr>
+              <a:t>After excluding exact ties in either method: rank 85.88%, Trace 84.73%. This changes the model/root mix; equal-weight-per-root accuracy still favors Trace.</a:t>
+            </a:r>
+            <a:endParaRPr lang="en-US" sz="920" dirty="0"/>
           </a:p>
         </p:txBody>
       </p:sp>
@@ -8208,7 +8169,7 @@
               <a:buNone/>
             </a:pPr>
             <a:r>
-              <a:rPr lang="en-US" sz="900" b="1" spc="110" kern="0" dirty="0">
+              <a:rPr lang="en-US" sz="900" b="1" dirty="0">
                 <a:solidFill>
                   <a:srgbClr val="FDB515"/>
                 </a:solidFill>
@@ -8255,7 +8216,7 @@
                 <a:ea typeface="Aptos Display" pitchFamily="34" charset="-122"/>
                 <a:cs typeface="Aptos Display" pitchFamily="34" charset="-120"/>
               </a:rPr>
-              <a:t>The evaluation boundary matches; the estimator and scale do not</a:t>
+              <a:t>Our larger study is not an exact replication</a:t>
             </a:r>
             <a:endParaRPr lang="en-US" sz="2500" dirty="0"/>
           </a:p>
@@ -8340,7 +8301,7 @@
                 <a:ea typeface="Aptos" pitchFamily="34" charset="-122"/>
                 <a:cs typeface="Aptos" pitchFamily="34" charset="-120"/>
               </a:rPr>
-              <a:t>Paper: arXiv:2607.03377v1. Current metrics: lineage_gallery_metrics.csv.</a:t>
+              <a:t>Sources: arxiv.org/html/2607.03377v1, Sec. 4.2 and 5.3; reassessment_0063666fd5733b453c38/protocol.json</a:t>
             </a:r>
             <a:endParaRPr lang="en-US" sz="660" dirty="0"/>
           </a:p>
@@ -8469,7 +8430,7 @@
                 <a:ea typeface="Aptos" pitchFamily="34" charset="-122"/>
                 <a:cs typeface="Aptos" pitchFamily="34" charset="-120"/>
               </a:rPr>
-              <a:t>Reference paper</a:t>
+              <a:t>Spectral Signatures paper</a:t>
             </a:r>
             <a:endParaRPr lang="en-US" sz="1000" dirty="0"/>
           </a:p>
@@ -8514,7 +8475,7 @@
                 <a:ea typeface="Aptos" pitchFamily="34" charset="-122"/>
                 <a:cs typeface="Aptos" pitchFamily="34" charset="-120"/>
               </a:rPr>
-              <a:t>Current study</a:t>
+              <a:t>Exploratory reassessment</a:t>
             </a:r>
             <a:endParaRPr lang="en-US" sz="1000" dirty="0"/>
           </a:p>
@@ -8559,7 +8520,7 @@
                 <a:ea typeface="Aptos" pitchFamily="34" charset="-122"/>
                 <a:cs typeface="Aptos" pitchFamily="34" charset="-120"/>
               </a:rPr>
-              <a:t>Model selection</a:t>
+              <a:t>Prediction boundary</a:t>
             </a:r>
             <a:endParaRPr lang="en-US" sz="1020" dirty="0"/>
           </a:p>
@@ -8604,7 +8565,7 @@
                 <a:ea typeface="Aptos" pitchFamily="34" charset="-122"/>
                 <a:cs typeface="Aptos" pitchFamily="34" charset="-120"/>
               </a:rPr>
-              <a:t>Public provenance</a:t>
+              <a:t>Weight similarities; training scores for prediction</a:t>
             </a:r>
             <a:endParaRPr lang="en-US" sz="1020" dirty="0"/>
           </a:p>
@@ -8649,7 +8610,7 @@
                 <a:ea typeface="Aptos" pitchFamily="34" charset="-122"/>
                 <a:cs typeface="Aptos" pitchFamily="34" charset="-120"/>
               </a:rPr>
-              <a:t>Fixed candidate list + labels opened afterward</a:t>
+              <a:t>Weight features; training-only score fitting</a:t>
             </a:r>
             <a:endParaRPr lang="en-US" sz="1020" dirty="0"/>
           </a:p>
@@ -8694,7 +8655,7 @@
                 <a:ea typeface="Aptos" pitchFamily="34" charset="-122"/>
                 <a:cs typeface="Aptos" pitchFamily="34" charset="-120"/>
               </a:rPr>
-              <a:t>Queries / bases</a:t>
+              <a:t>Alpha estimator</a:t>
             </a:r>
             <a:endParaRPr lang="en-US" sz="1020" dirty="0"/>
           </a:p>
@@ -8739,7 +8700,7 @@
                 <a:ea typeface="Aptos" pitchFamily="34" charset="-122"/>
                 <a:cs typeface="Aptos" pitchFamily="34" charset="-120"/>
               </a:rPr>
-              <a:t>128 / 8</a:t>
+              <a:t>Fixed-tail Hill, k = n/2</a:t>
             </a:r>
             <a:endParaRPr lang="en-US" sz="1020" dirty="0"/>
           </a:p>
@@ -8784,7 +8745,7 @@
                 <a:ea typeface="Aptos" pitchFamily="34" charset="-122"/>
                 <a:cs typeface="Aptos" pitchFamily="34" charset="-120"/>
               </a:rPr>
-              <a:t>3,836 / 29 profiled</a:t>
+              <a:t>Custom stored DKS; not WeightWatcher or fixed Hill</a:t>
             </a:r>
             <a:endParaRPr lang="en-US" sz="1020" dirty="0"/>
           </a:p>
@@ -8829,7 +8790,7 @@
                 <a:ea typeface="Aptos" pitchFamily="34" charset="-122"/>
                 <a:cs typeface="Aptos" pitchFamily="34" charset="-120"/>
               </a:rPr>
-              <a:t>Prediction input</a:t>
+              <a:t>Grouping / similarity</a:t>
             </a:r>
             <a:endParaRPr lang="en-US" sz="1020" dirty="0"/>
           </a:p>
@@ -8874,7 +8835,7 @@
                 <a:ea typeface="Aptos" pitchFamily="34" charset="-122"/>
                 <a:cs typeface="Aptos" pitchFamily="34" charset="-120"/>
               </a:rPr>
-              <a:t>Weights only</a:t>
+              <a:t>Flattened raw alpha / role-wise Spearman</a:t>
             </a:r>
             <a:endParaRPr lang="en-US" sz="1020" dirty="0"/>
           </a:p>
@@ -8919,7 +8880,7 @@
                 <a:ea typeface="Aptos" pitchFamily="34" charset="-122"/>
                 <a:cs typeface="Aptos" pitchFamily="34" charset="-120"/>
               </a:rPr>
-              <a:t>Weights only</a:t>
+              <a:t>Rank grouping retained; separate Trace base test</a:t>
             </a:r>
             <a:endParaRPr lang="en-US" sz="1020" dirty="0"/>
           </a:p>
@@ -8964,7 +8925,7 @@
                 <a:ea typeface="Aptos" pitchFamily="34" charset="-122"/>
                 <a:cs typeface="Aptos" pitchFamily="34" charset="-120"/>
               </a:rPr>
-              <a:t>Alpha</a:t>
+              <a:t>Unequal depth</a:t>
             </a:r>
             <a:endParaRPr lang="en-US" sz="1020" dirty="0"/>
           </a:p>
@@ -9009,7 +8970,7 @@
                 <a:ea typeface="Aptos" pitchFamily="34" charset="-122"/>
                 <a:cs typeface="Aptos" pitchFamily="34" charset="-120"/>
               </a:rPr>
-              <a:t>Fixed-tail Hill</a:t>
+              <a:t>Z-score + order-preserving matching</a:t>
             </a:r>
             <a:endParaRPr lang="en-US" sz="1020" dirty="0"/>
           </a:p>
@@ -9054,7 +9015,7 @@
                 <a:ea typeface="Aptos" pitchFamily="34" charset="-122"/>
                 <a:cs typeface="Aptos" pitchFamily="34" charset="-120"/>
               </a:rPr>
-              <a:t>Stored DKS</a:t>
+              <a:t>Ranks: 32-point interpolation; Trace: pair-max depth</a:t>
             </a:r>
             <a:endParaRPr lang="en-US" sz="1020" dirty="0"/>
           </a:p>
@@ -9099,7 +9060,7 @@
                 <a:ea typeface="Aptos" pitchFamily="34" charset="-122"/>
                 <a:cs typeface="Aptos" pitchFamily="34" charset="-120"/>
               </a:rPr>
-              <a:t>Unequal depth</a:t>
+              <a:t>Performance setup</a:t>
             </a:r>
             <a:endParaRPr lang="en-US" sz="1020" dirty="0"/>
           </a:p>
@@ -9144,7 +9105,7 @@
                 <a:ea typeface="Aptos" pitchFamily="34" charset="-122"/>
                 <a:cs typeface="Aptos" pitchFamily="34" charset="-120"/>
               </a:rPr>
-              <a:t>Z-score + order-preserving dynamic programming</a:t>
+              <a:t>Five folds stated; 100 half-splits in results</a:t>
             </a:r>
             <a:endParaRPr lang="en-US" sz="1020" dirty="0"/>
           </a:p>
@@ -9189,7 +9150,7 @@
                 <a:ea typeface="Aptos" pitchFamily="34" charset="-122"/>
                 <a:cs typeface="Aptos" pitchFamily="34" charset="-120"/>
               </a:rPr>
-              <a:t>32-point normalized-depth interpolation</a:t>
+              <a:t>Five fixed near-group parts; explicit stress splits</a:t>
             </a:r>
             <a:endParaRPr lang="en-US" sz="1020" dirty="0"/>
           </a:p>
@@ -9234,7 +9195,7 @@
                 <a:ea typeface="Aptos" pitchFamily="34" charset="-122"/>
                 <a:cs typeface="Aptos" pitchFamily="34" charset="-120"/>
               </a:rPr>
-              <a:t>Overall top-1</a:t>
+              <a:t>Scope of comparison</a:t>
             </a:r>
             <a:endParaRPr lang="en-US" sz="1020" dirty="0"/>
           </a:p>
@@ -9279,7 +9240,7 @@
                 <a:ea typeface="Aptos" pitchFamily="34" charset="-122"/>
                 <a:cs typeface="Aptos" pitchFamily="34" charset="-120"/>
               </a:rPr>
-              <a:t>98.44%</a:t>
+              <a:t>Different candidates, cohorts and targets</a:t>
             </a:r>
             <a:endParaRPr lang="en-US" sz="1020" dirty="0"/>
           </a:p>
@@ -9324,7 +9285,7 @@
                 <a:ea typeface="Aptos" pitchFamily="34" charset="-122"/>
                 <a:cs typeface="Aptos" pitchFamily="34" charset="-120"/>
               </a:rPr>
-              <a:t>82.27%</a:t>
+              <a:t>No matched replication; no claim to beat the paper</a:t>
             </a:r>
             <a:endParaRPr lang="en-US" sz="1020" dirty="0"/>
           </a:p>
@@ -9371,7 +9332,7 @@
                 <a:ea typeface="Aptos" pitchFamily="34" charset="-122"/>
                 <a:cs typeface="Aptos" pitchFamily="34" charset="-120"/>
               </a:rPr>
-              <a:t>Do not interpret the accuracy gap as an estimator ranking: the candidate sets, labels, coverage, alpha fit, and depth handling differ.</a:t>
+              <a:t>The paper's split-description discrepancy is unresolved. Neither its accuracy nor our MAE establishes superiority across different populations and protocols.</a:t>
             </a:r>
             <a:endParaRPr lang="en-US" sz="1050" dirty="0"/>
           </a:p>
@@ -9515,7 +9476,7 @@
               <a:buNone/>
             </a:pPr>
             <a:r>
-              <a:rPr lang="en-US" sz="900" b="1" spc="110" kern="0" dirty="0">
+              <a:rPr lang="en-US" sz="900" b="1" dirty="0">
                 <a:solidFill>
                   <a:srgbClr val="003B95"/>
                 </a:solidFill>
@@ -9562,7 +9523,7 @@
                 <a:ea typeface="Aptos Display" pitchFamily="34" charset="-122"/>
                 <a:cs typeface="Aptos Display" pitchFamily="34" charset="-120"/>
               </a:rPr>
-              <a:t>Every scored model is tested using models outside its test part</a:t>
+              <a:t>Keep similar models together in five test parts</a:t>
             </a:r>
             <a:endParaRPr lang="en-US" sz="2500" dirty="0"/>
           </a:p>
@@ -9647,7 +9608,7 @@
                 <a:ea typeface="Aptos" pitchFamily="34" charset="-122"/>
                 <a:cs typeface="Aptos" pitchFamily="34" charset="-120"/>
               </a:rPr>
-              <a:t>Sources: weight_only_2a5abfeb98dc33d9662c/performance_frozen_splits.csv and performance_prediction_freeze.csv</a:t>
+              <a:t>Sources: reassessment_0063666fd5733b453c38/protocol.json, splits.csv and performance_predictions.csv</a:t>
             </a:r>
             <a:endParaRPr lang="en-US" sz="660" dirty="0"/>
           </a:p>
@@ -9772,7 +9733,7 @@
                 <a:ea typeface="Aptos" pitchFamily="34" charset="-122"/>
                 <a:cs typeface="Aptos" pitchFamily="34" charset="-120"/>
               </a:rPr>
-              <a:t>Group identical</a:t>
+              <a:t>Connect near profiles</a:t>
             </a:r>
             <a:endParaRPr lang="en-US" sz="1160" dirty="0"/>
           </a:p>
@@ -9789,7 +9750,7 @@
                 <a:ea typeface="Aptos" pitchFamily="34" charset="-122"/>
                 <a:cs typeface="Aptos" pitchFamily="34" charset="-120"/>
               </a:rPr>
-              <a:t>observed-role summaries</a:t>
+              <a:t>similarity &gt;= 0.995</a:t>
             </a:r>
             <a:endParaRPr lang="en-US" sz="1160" dirty="0"/>
           </a:p>
@@ -9860,7 +9821,7 @@
                 <a:ea typeface="Aptos" pitchFamily="34" charset="-122"/>
                 <a:cs typeface="Aptos" pitchFamily="34" charset="-120"/>
               </a:rPr>
-              <a:t>Divide those groups</a:t>
+              <a:t>Keep each group intact</a:t>
             </a:r>
             <a:endParaRPr lang="en-US" sz="1160" dirty="0"/>
           </a:p>
@@ -9877,7 +9838,7 @@
                 <a:ea typeface="Aptos" pitchFamily="34" charset="-122"/>
                 <a:cs typeface="Aptos" pitchFamily="34" charset="-120"/>
               </a:rPr>
-              <a:t>into five parts</a:t>
+              <a:t>in five fixed parts</a:t>
             </a:r>
             <a:endParaRPr lang="en-US" sz="1160" dirty="0"/>
           </a:p>
@@ -9948,7 +9909,7 @@
                 <a:ea typeface="Aptos" pitchFamily="34" charset="-122"/>
                 <a:cs typeface="Aptos" pitchFamily="34" charset="-120"/>
               </a:rPr>
-              <a:t>Save the division</a:t>
+              <a:t>Freeze the same splits</a:t>
             </a:r>
             <a:endParaRPr lang="en-US" sz="1160" dirty="0"/>
           </a:p>
@@ -9965,7 +9926,7 @@
                 <a:ea typeface="Aptos" pitchFamily="34" charset="-122"/>
                 <a:cs typeface="Aptos" pitchFamily="34" charset="-120"/>
               </a:rPr>
-              <a:t>before prediction</a:t>
+              <a:t>for predictor contrasts</a:t>
             </a:r>
             <a:endParaRPr lang="en-US" sz="1160" dirty="0"/>
           </a:p>
@@ -10227,7 +10188,7 @@
                 <a:ea typeface="Aptos" pitchFamily="34" charset="-122"/>
                 <a:cs typeface="Aptos" pitchFamily="34" charset="-120"/>
               </a:rPr>
-              <a:t>Find 3 closest</a:t>
+              <a:t>Fit preprocessing</a:t>
             </a:r>
             <a:endParaRPr lang="en-US" sz="1060" dirty="0"/>
           </a:p>
@@ -10244,7 +10205,7 @@
                 <a:ea typeface="Aptos" pitchFamily="34" charset="-122"/>
                 <a:cs typeface="Aptos" pitchFamily="34" charset="-120"/>
               </a:rPr>
-              <a:t>training models</a:t>
+              <a:t>on training rows only</a:t>
             </a:r>
             <a:endParaRPr lang="en-US" sz="1060" dirty="0"/>
           </a:p>
@@ -10315,7 +10276,7 @@
                 <a:ea typeface="Aptos" pitchFamily="34" charset="-122"/>
                 <a:cs typeface="Aptos" pitchFamily="34" charset="-120"/>
               </a:rPr>
-              <a:t>Predict a weighted</a:t>
+              <a:t>Fit fixed trees / ridge</a:t>
             </a:r>
             <a:endParaRPr lang="en-US" sz="1060" dirty="0"/>
           </a:p>
@@ -10332,7 +10293,7 @@
                 <a:ea typeface="Aptos" pitchFamily="34" charset="-122"/>
                 <a:cs typeface="Aptos" pitchFamily="34" charset="-120"/>
               </a:rPr>
-              <a:t>score average</a:t>
+              <a:t>or rank 3-neighbor model</a:t>
             </a:r>
             <a:endParaRPr lang="en-US" sz="1060" dirty="0"/>
           </a:p>
@@ -10435,11 +10396,11 @@
         <p:spPr>
           <a:xfrm>
             <a:off x="694944" y="4800600"/>
-            <a:ext cx="5257800" cy="603504"/>
+            <a:ext cx="5257800" cy="768096"/>
           </a:xfrm>
           <a:prstGeom prst="roundRect">
             <a:avLst>
-              <a:gd name="adj" fmla="val 7576"/>
+              <a:gd name="adj" fmla="val 5952"/>
             </a:avLst>
           </a:prstGeom>
           <a:solidFill>
@@ -10467,7 +10428,7 @@
                 <a:ea typeface="Aptos" pitchFamily="34" charset="-122"/>
                 <a:cs typeface="Aptos" pitchFamily="34" charset="-120"/>
               </a:rPr>
-              <a:t>A fold is one of the five parts. Each part takes one turn as the held-out test set.</a:t>
+              <a:t>Fixed trees: 200 iterations, 15 leaves, rate 0.05, L2=10, minimum leaf=20. Ridge penalty=100; no held-out tuning.</a:t>
             </a:r>
             <a:endParaRPr lang="en-US" sz="1030" dirty="0"/>
           </a:p>
@@ -10482,11 +10443,11 @@
         <p:spPr>
           <a:xfrm>
             <a:off x="6217920" y="4800600"/>
-            <a:ext cx="5257800" cy="603504"/>
+            <a:ext cx="5257800" cy="768096"/>
           </a:xfrm>
           <a:prstGeom prst="roundRect">
             <a:avLst>
-              <a:gd name="adj" fmla="val 7576"/>
+              <a:gd name="adj" fmla="val 5952"/>
             </a:avLst>
           </a:prstGeom>
           <a:solidFill>
@@ -10514,7 +10475,7 @@
                 <a:ea typeface="Aptos" pitchFamily="34" charset="-122"/>
                 <a:cs typeface="Aptos" pitchFamily="34" charset="-120"/>
               </a:rPr>
-              <a:t>Identical summaries stay together. Closer spectral matches receive more weight.</a:t>
+              <a:t>Controls: shape, non-alpha spectra, combined spectra, and rank neighbors. Average-score targets and individual tasks are evaluated separately.</a:t>
             </a:r>
             <a:endParaRPr lang="en-US" sz="1030" dirty="0"/>
           </a:p>
@@ -10528,8 +10489,8 @@
         </p:nvSpPr>
         <p:spPr>
           <a:xfrm>
-            <a:off x="658368" y="5769864"/>
-            <a:ext cx="10881360" cy="274320"/>
+            <a:off x="658368" y="5843016"/>
+            <a:ext cx="10881360" cy="393192"/>
           </a:xfrm>
           <a:prstGeom prst="rect">
             <a:avLst/>
@@ -10553,7 +10514,7 @@
                 <a:ea typeface="Aptos" pitchFamily="34" charset="-122"/>
                 <a:cs typeface="Aptos" pitchFamily="34" charset="-120"/>
               </a:rPr>
-              <a:t>Modern and legacy benchmark sets are trained and evaluated separately. Descriptive metadata is never a predictor input.</a:t>
+              <a:t>Training scores are permitted; held-out scores are for evaluation. Collection labels define one stress split. Previously studied data: exploratory, not untouched confirmation.</a:t>
             </a:r>
             <a:endParaRPr lang="en-US" sz="1020" dirty="0"/>
           </a:p>
@@ -10697,7 +10658,7 @@
               <a:buNone/>
             </a:pPr>
             <a:r>
-              <a:rPr lang="en-US" sz="900" b="1" spc="110" kern="0" dirty="0">
+              <a:rPr lang="en-US" sz="900" b="1" dirty="0">
                 <a:solidFill>
                   <a:srgbClr val="003B95"/>
                 </a:solidFill>
@@ -10705,7 +10666,7 @@
                 <a:ea typeface="Aptos" pitchFamily="34" charset="-122"/>
                 <a:cs typeface="Aptos" pitchFamily="34" charset="-120"/>
               </a:rPr>
-              <a:t>PERFORMANCE RESULTS</a:t>
+              <a:t>PERFORMANCE CONTROLS</a:t>
             </a:r>
             <a:endParaRPr lang="en-US" sz="900" dirty="0"/>
           </a:p>
@@ -10744,7 +10705,7 @@
                 <a:ea typeface="Aptos Display" pitchFamily="34" charset="-122"/>
                 <a:cs typeface="Aptos Display" pitchFamily="34" charset="-120"/>
               </a:rPr>
-              <a:t>Nearest spectral neighbors predict well when similar models are represented</a:t>
+              <a:t>Alpha does not improve the key performance controls</a:t>
             </a:r>
             <a:endParaRPr lang="en-US" sz="2500" dirty="0"/>
           </a:p>
@@ -10829,7 +10790,7 @@
                 <a:ea typeface="Aptos" pitchFamily="34" charset="-122"/>
                 <a:cs typeface="Aptos" pitchFamily="34" charset="-120"/>
               </a:rPr>
-              <a:t>Source: weight_only_2a5abfeb98dc33d9662c/performance_metrics.csv</a:t>
+              <a:t>Sources: reassessment_0063666fd5733b453c38/performance_metrics.csv and performance_task_metrics.csv; near_group_0995, matched_role_population</a:t>
             </a:r>
             <a:endParaRPr lang="en-US" sz="660" dirty="0"/>
           </a:p>
@@ -10876,7 +10837,7 @@
       </p:sp>
       <p:pic>
         <p:nvPicPr>
-          <p:cNvPr id="11" name="Image 0" descr="/scratch/kinshuk/Model-Research/deliverables/htsr_model_zoo_deck/assets/performance_interpolation.png">    </p:cNvPr>
+          <p:cNvPr id="11" name="Image 0" descr="/scratch/kinshuk/Model-Research/deliverables/htsr_model_zoo_deck/assets/review_performance.png">    </p:cNvPr>
           <p:cNvPicPr>
             <a:picLocks noChangeAspect="1"/>
           </p:cNvPicPr>
@@ -10890,499 +10851,192 @@
         </p:blipFill>
         <p:spPr>
           <a:xfrm>
-            <a:off x="438912" y="1764162"/>
-            <a:ext cx="7360920" cy="3841741"/>
+            <a:off x="384048" y="1551056"/>
+            <a:ext cx="6803136" cy="3481567"/>
           </a:xfrm>
           <a:prstGeom prst="rect">
             <a:avLst/>
           </a:prstGeom>
         </p:spPr>
       </p:pic>
-      <p:sp>
-        <p:nvSpPr>
-          <p:cNvPr id="12" name="Text 9"/>
-          <p:cNvSpPr/>
-          <p:nvPr/>
-        </p:nvSpPr>
-        <p:spPr>
-          <a:xfrm>
-            <a:off x="8046720" y="1271016"/>
-            <a:ext cx="1554480" cy="274320"/>
-          </a:xfrm>
-          <a:prstGeom prst="rect">
-            <a:avLst/>
-          </a:prstGeom>
-          <a:noFill/>
-          <a:ln/>
-        </p:spPr>
-        <p:txBody>
-          <a:bodyPr wrap="square" lIns="0" tIns="0" rIns="0" bIns="0" rtlCol="0" anchor="t"/>
-          <a:lstStyle/>
-          <a:p>
-            <a:pPr indent="0" marL="0">
-              <a:buNone/>
-            </a:pPr>
-            <a:r>
-              <a:rPr lang="en-US" sz="1500" b="1" dirty="0">
-                <a:solidFill>
-                  <a:srgbClr val="003B95"/>
-                </a:solidFill>
-                <a:latin typeface="Aptos" pitchFamily="34" charset="0"/>
-                <a:ea typeface="Aptos" pitchFamily="34" charset="-122"/>
-                <a:cs typeface="Aptos" pitchFamily="34" charset="-120"/>
-              </a:rPr>
-              <a:t>Modern</a:t>
-            </a:r>
-            <a:endParaRPr lang="en-US" sz="1500" dirty="0"/>
-          </a:p>
-        </p:txBody>
-      </p:sp>
-      <p:sp>
-        <p:nvSpPr>
-          <p:cNvPr id="13" name="Text 10"/>
-          <p:cNvSpPr/>
-          <p:nvPr/>
-        </p:nvSpPr>
-        <p:spPr>
-          <a:xfrm>
-            <a:off x="8046720" y="1700784"/>
-            <a:ext cx="1170432" cy="438912"/>
-          </a:xfrm>
-          <a:prstGeom prst="rect">
-            <a:avLst/>
-          </a:prstGeom>
-          <a:noFill/>
-          <a:ln/>
-        </p:spPr>
-        <p:txBody>
-          <a:bodyPr wrap="square" lIns="0" tIns="0" rIns="0" bIns="0" rtlCol="0" anchor="t"/>
-          <a:lstStyle/>
-          <a:p>
-            <a:pPr indent="0" marL="0">
-              <a:buNone/>
-            </a:pPr>
-            <a:r>
-              <a:rPr lang="en-US" sz="2700" b="1" dirty="0">
-                <a:solidFill>
-                  <a:srgbClr val="003B95"/>
-                </a:solidFill>
-                <a:latin typeface="Aptos Display" pitchFamily="34" charset="0"/>
-                <a:ea typeface="Aptos Display" pitchFamily="34" charset="-122"/>
-                <a:cs typeface="Aptos Display" pitchFamily="34" charset="-120"/>
-              </a:rPr>
-              <a:t>3.043</a:t>
-            </a:r>
-            <a:endParaRPr lang="en-US" sz="2700" dirty="0"/>
-          </a:p>
-        </p:txBody>
-      </p:sp>
-      <p:sp>
-        <p:nvSpPr>
-          <p:cNvPr id="14" name="Text 11"/>
-          <p:cNvSpPr/>
-          <p:nvPr/>
-        </p:nvSpPr>
-        <p:spPr>
-          <a:xfrm>
-            <a:off x="8046720" y="2185416"/>
-            <a:ext cx="1170432" cy="292608"/>
-          </a:xfrm>
-          <a:prstGeom prst="rect">
-            <a:avLst/>
-          </a:prstGeom>
-          <a:noFill/>
-          <a:ln/>
-        </p:spPr>
-        <p:txBody>
-          <a:bodyPr wrap="square" lIns="0" tIns="0" rIns="0" bIns="0" rtlCol="0" anchor="t"/>
-          <a:lstStyle/>
-          <a:p>
-            <a:pPr indent="0" marL="0">
-              <a:buNone/>
-            </a:pPr>
-            <a:r>
-              <a:rPr lang="en-US" sz="1050" b="1" dirty="0">
-                <a:solidFill>
-                  <a:srgbClr val="14213D"/>
-                </a:solidFill>
-                <a:latin typeface="Aptos" pitchFamily="34" charset="0"/>
-                <a:ea typeface="Aptos" pitchFamily="34" charset="-122"/>
-                <a:cs typeface="Aptos" pitchFamily="34" charset="-120"/>
-              </a:rPr>
-              <a:t>MAE</a:t>
-            </a:r>
-            <a:endParaRPr lang="en-US" sz="1050" dirty="0"/>
-          </a:p>
-        </p:txBody>
-      </p:sp>
-      <p:sp>
-        <p:nvSpPr>
-          <p:cNvPr id="15" name="Text 12"/>
-          <p:cNvSpPr/>
-          <p:nvPr/>
-        </p:nvSpPr>
-        <p:spPr>
-          <a:xfrm>
-            <a:off x="9482328" y="1700784"/>
-            <a:ext cx="1325880" cy="438912"/>
-          </a:xfrm>
-          <a:prstGeom prst="rect">
-            <a:avLst/>
-          </a:prstGeom>
-          <a:noFill/>
-          <a:ln/>
-        </p:spPr>
-        <p:txBody>
-          <a:bodyPr wrap="square" lIns="0" tIns="0" rIns="0" bIns="0" rtlCol="0" anchor="t"/>
-          <a:lstStyle/>
-          <a:p>
-            <a:pPr indent="0" marL="0">
-              <a:buNone/>
-            </a:pPr>
-            <a:r>
-              <a:rPr lang="en-US" sz="2700" b="1" dirty="0">
-                <a:solidFill>
-                  <a:srgbClr val="00693E"/>
-                </a:solidFill>
-                <a:latin typeface="Aptos Display" pitchFamily="34" charset="0"/>
-                <a:ea typeface="Aptos Display" pitchFamily="34" charset="-122"/>
-                <a:cs typeface="Aptos Display" pitchFamily="34" charset="-120"/>
-              </a:rPr>
-              <a:t>0.875</a:t>
-            </a:r>
-            <a:endParaRPr lang="en-US" sz="2700" dirty="0"/>
-          </a:p>
-        </p:txBody>
-      </p:sp>
-      <p:sp>
-        <p:nvSpPr>
-          <p:cNvPr id="16" name="Text 13"/>
-          <p:cNvSpPr/>
-          <p:nvPr/>
-        </p:nvSpPr>
-        <p:spPr>
-          <a:xfrm>
-            <a:off x="9482328" y="2185416"/>
-            <a:ext cx="1325880" cy="292608"/>
-          </a:xfrm>
-          <a:prstGeom prst="rect">
-            <a:avLst/>
-          </a:prstGeom>
-          <a:noFill/>
-          <a:ln/>
-        </p:spPr>
-        <p:txBody>
-          <a:bodyPr wrap="square" lIns="0" tIns="0" rIns="0" bIns="0" rtlCol="0" anchor="t"/>
-          <a:lstStyle/>
-          <a:p>
-            <a:pPr indent="0" marL="0">
-              <a:buNone/>
-            </a:pPr>
-            <a:r>
-              <a:rPr lang="en-US" sz="1050" b="1" dirty="0">
-                <a:solidFill>
-                  <a:srgbClr val="14213D"/>
-                </a:solidFill>
-                <a:latin typeface="Aptos" pitchFamily="34" charset="0"/>
-                <a:ea typeface="Aptos" pitchFamily="34" charset="-122"/>
-                <a:cs typeface="Aptos" pitchFamily="34" charset="-120"/>
-              </a:rPr>
-              <a:t>Spearman</a:t>
-            </a:r>
-            <a:endParaRPr lang="en-US" sz="1050" dirty="0"/>
-          </a:p>
-        </p:txBody>
-      </p:sp>
-      <p:sp>
-        <p:nvSpPr>
-          <p:cNvPr id="17" name="Text 14"/>
-          <p:cNvSpPr/>
-          <p:nvPr/>
-        </p:nvSpPr>
-        <p:spPr>
-          <a:xfrm>
-            <a:off x="8046720" y="2779776"/>
-            <a:ext cx="3154680" cy="256032"/>
-          </a:xfrm>
-          <a:prstGeom prst="rect">
-            <a:avLst/>
-          </a:prstGeom>
-          <a:noFill/>
-          <a:ln/>
-        </p:spPr>
-        <p:txBody>
-          <a:bodyPr wrap="square" lIns="0" tIns="0" rIns="0" bIns="0" rtlCol="0" anchor="t"/>
-          <a:lstStyle/>
-          <a:p>
-            <a:pPr indent="0" marL="0">
-              <a:buNone/>
-            </a:pPr>
-            <a:r>
-              <a:rPr lang="en-US" sz="930" dirty="0">
-                <a:solidFill>
-                  <a:srgbClr val="667085"/>
-                </a:solidFill>
-                <a:latin typeface="Aptos" pitchFamily="34" charset="0"/>
-                <a:ea typeface="Aptos" pitchFamily="34" charset="-122"/>
-                <a:cs typeface="Aptos" pitchFamily="34" charset="-120"/>
-              </a:rPr>
-              <a:t>2,537 models / 2,410 unique spectral summaries</a:t>
-            </a:r>
-            <a:endParaRPr lang="en-US" sz="930" dirty="0"/>
-          </a:p>
-        </p:txBody>
-      </p:sp>
-      <p:sp>
-        <p:nvSpPr>
-          <p:cNvPr id="18" name="Text 15"/>
-          <p:cNvSpPr/>
-          <p:nvPr/>
-        </p:nvSpPr>
-        <p:spPr>
-          <a:xfrm>
-            <a:off x="8046720" y="3310128"/>
-            <a:ext cx="1554480" cy="274320"/>
-          </a:xfrm>
-          <a:prstGeom prst="rect">
-            <a:avLst/>
-          </a:prstGeom>
-          <a:noFill/>
-          <a:ln/>
-        </p:spPr>
-        <p:txBody>
-          <a:bodyPr wrap="square" lIns="0" tIns="0" rIns="0" bIns="0" rtlCol="0" anchor="t"/>
-          <a:lstStyle/>
-          <a:p>
-            <a:pPr indent="0" marL="0">
-              <a:buNone/>
-            </a:pPr>
-            <a:r>
-              <a:rPr lang="en-US" sz="1500" b="1" dirty="0">
-                <a:solidFill>
-                  <a:srgbClr val="00693E"/>
-                </a:solidFill>
-                <a:latin typeface="Aptos" pitchFamily="34" charset="0"/>
-                <a:ea typeface="Aptos" pitchFamily="34" charset="-122"/>
-                <a:cs typeface="Aptos" pitchFamily="34" charset="-120"/>
-              </a:rPr>
-              <a:t>Legacy</a:t>
-            </a:r>
-            <a:endParaRPr lang="en-US" sz="1500" dirty="0"/>
-          </a:p>
-        </p:txBody>
-      </p:sp>
-      <p:sp>
-        <p:nvSpPr>
-          <p:cNvPr id="19" name="Text 16"/>
-          <p:cNvSpPr/>
-          <p:nvPr/>
-        </p:nvSpPr>
-        <p:spPr>
-          <a:xfrm>
-            <a:off x="8046720" y="3739896"/>
-            <a:ext cx="1170432" cy="438912"/>
-          </a:xfrm>
-          <a:prstGeom prst="rect">
-            <a:avLst/>
-          </a:prstGeom>
-          <a:noFill/>
-          <a:ln/>
-        </p:spPr>
-        <p:txBody>
-          <a:bodyPr wrap="square" lIns="0" tIns="0" rIns="0" bIns="0" rtlCol="0" anchor="t"/>
-          <a:lstStyle/>
-          <a:p>
-            <a:pPr indent="0" marL="0">
-              <a:buNone/>
-            </a:pPr>
-            <a:r>
-              <a:rPr lang="en-US" sz="2700" b="1" dirty="0">
-                <a:solidFill>
-                  <a:srgbClr val="003B95"/>
-                </a:solidFill>
-                <a:latin typeface="Aptos Display" pitchFamily="34" charset="0"/>
-                <a:ea typeface="Aptos Display" pitchFamily="34" charset="-122"/>
-                <a:cs typeface="Aptos Display" pitchFamily="34" charset="-120"/>
-              </a:rPr>
-              <a:t>3.188</a:t>
-            </a:r>
-            <a:endParaRPr lang="en-US" sz="2700" dirty="0"/>
-          </a:p>
-        </p:txBody>
-      </p:sp>
-      <p:sp>
-        <p:nvSpPr>
-          <p:cNvPr id="20" name="Text 17"/>
-          <p:cNvSpPr/>
-          <p:nvPr/>
-        </p:nvSpPr>
-        <p:spPr>
-          <a:xfrm>
-            <a:off x="8046720" y="4224528"/>
-            <a:ext cx="1170432" cy="292608"/>
-          </a:xfrm>
-          <a:prstGeom prst="rect">
-            <a:avLst/>
-          </a:prstGeom>
-          <a:noFill/>
-          <a:ln/>
-        </p:spPr>
-        <p:txBody>
-          <a:bodyPr wrap="square" lIns="0" tIns="0" rIns="0" bIns="0" rtlCol="0" anchor="t"/>
-          <a:lstStyle/>
-          <a:p>
-            <a:pPr indent="0" marL="0">
-              <a:buNone/>
-            </a:pPr>
-            <a:r>
-              <a:rPr lang="en-US" sz="1050" b="1" dirty="0">
-                <a:solidFill>
-                  <a:srgbClr val="14213D"/>
-                </a:solidFill>
-                <a:latin typeface="Aptos" pitchFamily="34" charset="0"/>
-                <a:ea typeface="Aptos" pitchFamily="34" charset="-122"/>
-                <a:cs typeface="Aptos" pitchFamily="34" charset="-120"/>
-              </a:rPr>
-              <a:t>MAE</a:t>
-            </a:r>
-            <a:endParaRPr lang="en-US" sz="1050" dirty="0"/>
-          </a:p>
-        </p:txBody>
-      </p:sp>
-      <p:sp>
-        <p:nvSpPr>
-          <p:cNvPr id="21" name="Text 18"/>
-          <p:cNvSpPr/>
-          <p:nvPr/>
-        </p:nvSpPr>
-        <p:spPr>
-          <a:xfrm>
-            <a:off x="9482328" y="3739896"/>
-            <a:ext cx="1325880" cy="438912"/>
-          </a:xfrm>
-          <a:prstGeom prst="rect">
-            <a:avLst/>
-          </a:prstGeom>
-          <a:noFill/>
-          <a:ln/>
-        </p:spPr>
-        <p:txBody>
-          <a:bodyPr wrap="square" lIns="0" tIns="0" rIns="0" bIns="0" rtlCol="0" anchor="t"/>
-          <a:lstStyle/>
-          <a:p>
-            <a:pPr indent="0" marL="0">
-              <a:buNone/>
-            </a:pPr>
-            <a:r>
-              <a:rPr lang="en-US" sz="2700" b="1" dirty="0">
-                <a:solidFill>
-                  <a:srgbClr val="00693E"/>
-                </a:solidFill>
-                <a:latin typeface="Aptos Display" pitchFamily="34" charset="0"/>
-                <a:ea typeface="Aptos Display" pitchFamily="34" charset="-122"/>
-                <a:cs typeface="Aptos Display" pitchFamily="34" charset="-120"/>
-              </a:rPr>
-              <a:t>0.897</a:t>
-            </a:r>
-            <a:endParaRPr lang="en-US" sz="2700" dirty="0"/>
-          </a:p>
-        </p:txBody>
-      </p:sp>
-      <p:sp>
-        <p:nvSpPr>
-          <p:cNvPr id="22" name="Text 19"/>
-          <p:cNvSpPr/>
-          <p:nvPr/>
-        </p:nvSpPr>
-        <p:spPr>
-          <a:xfrm>
-            <a:off x="9482328" y="4224528"/>
-            <a:ext cx="1325880" cy="292608"/>
-          </a:xfrm>
-          <a:prstGeom prst="rect">
-            <a:avLst/>
-          </a:prstGeom>
-          <a:noFill/>
-          <a:ln/>
-        </p:spPr>
-        <p:txBody>
-          <a:bodyPr wrap="square" lIns="0" tIns="0" rIns="0" bIns="0" rtlCol="0" anchor="t"/>
-          <a:lstStyle/>
-          <a:p>
-            <a:pPr indent="0" marL="0">
-              <a:buNone/>
-            </a:pPr>
-            <a:r>
-              <a:rPr lang="en-US" sz="1050" b="1" dirty="0">
-                <a:solidFill>
-                  <a:srgbClr val="14213D"/>
-                </a:solidFill>
-                <a:latin typeface="Aptos" pitchFamily="34" charset="0"/>
-                <a:ea typeface="Aptos" pitchFamily="34" charset="-122"/>
-                <a:cs typeface="Aptos" pitchFamily="34" charset="-120"/>
-              </a:rPr>
-              <a:t>Spearman</a:t>
-            </a:r>
-            <a:endParaRPr lang="en-US" sz="1050" dirty="0"/>
-          </a:p>
-        </p:txBody>
-      </p:sp>
-      <p:sp>
-        <p:nvSpPr>
-          <p:cNvPr id="23" name="Text 20"/>
-          <p:cNvSpPr/>
-          <p:nvPr/>
-        </p:nvSpPr>
-        <p:spPr>
-          <a:xfrm>
-            <a:off x="8046720" y="4818888"/>
-            <a:ext cx="3154680" cy="256032"/>
-          </a:xfrm>
-          <a:prstGeom prst="rect">
-            <a:avLst/>
-          </a:prstGeom>
-          <a:noFill/>
-          <a:ln/>
-        </p:spPr>
-        <p:txBody>
-          <a:bodyPr wrap="square" lIns="0" tIns="0" rIns="0" bIns="0" rtlCol="0" anchor="t"/>
-          <a:lstStyle/>
-          <a:p>
-            <a:pPr indent="0" marL="0">
-              <a:buNone/>
-            </a:pPr>
-            <a:r>
-              <a:rPr lang="en-US" sz="930" dirty="0">
-                <a:solidFill>
-                  <a:srgbClr val="667085"/>
-                </a:solidFill>
-                <a:latin typeface="Aptos" pitchFamily="34" charset="0"/>
-                <a:ea typeface="Aptos" pitchFamily="34" charset="-122"/>
-                <a:cs typeface="Aptos" pitchFamily="34" charset="-120"/>
-              </a:rPr>
-              <a:t>3,515 models / 3,363 unique spectral summaries</a:t>
-            </a:r>
-            <a:endParaRPr lang="en-US" sz="930" dirty="0"/>
-          </a:p>
-        </p:txBody>
-      </p:sp>
-      <p:sp>
-        <p:nvSpPr>
-          <p:cNvPr id="24" name="Text 21"/>
-          <p:cNvSpPr/>
-          <p:nvPr/>
-        </p:nvSpPr>
-        <p:spPr>
-          <a:xfrm>
-            <a:off x="8046720" y="5330952"/>
-            <a:ext cx="3127248" cy="612648"/>
+      <p:pic>
+        <p:nvPicPr>
+          <p:cNvPr id="12" name="Image 1" descr="/scratch/kinshuk/Model-Research/deliverables/htsr_model_zoo_deck/assets/review_tasks.png">    </p:cNvPr>
+          <p:cNvPicPr>
+            <a:picLocks noChangeAspect="1"/>
+          </p:cNvPicPr>
+          <p:nvPr/>
+        </p:nvPicPr>
+        <p:blipFill>
+          <a:blip r:embed="rId2"/>
+          <a:stretch>
+            <a:fillRect/>
+          </a:stretch>
+        </p:blipFill>
+        <p:spPr>
+          <a:xfrm>
+            <a:off x="7342632" y="1517061"/>
+            <a:ext cx="4334256" cy="2662589"/>
+          </a:xfrm>
+          <a:prstGeom prst="rect">
+            <a:avLst/>
+          </a:prstGeom>
+        </p:spPr>
+      </p:pic>
+      <p:sp>
+        <p:nvSpPr>
+          <p:cNvPr id="13" name="Text 9"/>
+          <p:cNvSpPr/>
+          <p:nvPr/>
+        </p:nvSpPr>
+        <p:spPr>
+          <a:xfrm>
+            <a:off x="7424928" y="4736592"/>
+            <a:ext cx="4050792" cy="941832"/>
           </a:xfrm>
           <a:prstGeom prst="roundRect">
             <a:avLst>
-              <a:gd name="adj" fmla="val 7463"/>
+              <a:gd name="adj" fmla="val 4854"/>
             </a:avLst>
           </a:prstGeom>
           <a:solidFill>
+            <a:srgbClr val="E4F3EA"/>
+          </a:solidFill>
+          <a:ln w="10160">
+            <a:solidFill>
+              <a:srgbClr val="00693E"/>
+            </a:solidFill>
+          </a:ln>
+        </p:spPr>
+        <p:txBody>
+          <a:bodyPr wrap="square" lIns="1778" tIns="1778" rIns="1778" bIns="1778" rtlCol="0" anchor="ctr"/>
+          <a:lstStyle/>
+          <a:p>
+            <a:pPr algn="ctr" indent="0" marL="0">
+              <a:buNone/>
+            </a:pPr>
+            <a:r>
+              <a:rPr lang="en-US" sz="1050" b="1" dirty="0">
+                <a:solidFill>
+                  <a:srgbClr val="14213D"/>
+                </a:solidFill>
+                <a:latin typeface="Aptos" pitchFamily="34" charset="0"/>
+                <a:ea typeface="Aptos" pitchFamily="34" charset="-122"/>
+                <a:cs typeface="Aptos" pitchFamily="34" charset="-120"/>
+              </a:rPr>
+              <a:t>AVERAGE-SCORE MAE: MODERN / LEGACY</a:t>
+            </a:r>
+            <a:endParaRPr lang="en-US" sz="1050" dirty="0"/>
+          </a:p>
+          <a:p>
+            <a:pPr algn="ctr" indent="0" marL="0">
+              <a:buNone/>
+            </a:pPr>
+            <a:r>
+              <a:rPr lang="en-US" sz="1050" b="1" dirty="0">
+                <a:solidFill>
+                  <a:srgbClr val="14213D"/>
+                </a:solidFill>
+                <a:latin typeface="Aptos" pitchFamily="34" charset="0"/>
+                <a:ea typeface="Aptos" pitchFamily="34" charset="-122"/>
+                <a:cs typeface="Aptos" pitchFamily="34" charset="-120"/>
+              </a:rPr>
+              <a:t>Non-alpha trees 3.211 / 3.068</a:t>
+            </a:r>
+            <a:endParaRPr lang="en-US" sz="1050" dirty="0"/>
+          </a:p>
+          <a:p>
+            <a:pPr algn="ctr" indent="0" marL="0">
+              <a:buNone/>
+            </a:pPr>
+            <a:r>
+              <a:rPr lang="en-US" sz="1050" b="1" dirty="0">
+                <a:solidFill>
+                  <a:srgbClr val="14213D"/>
+                </a:solidFill>
+                <a:latin typeface="Aptos" pitchFamily="34" charset="0"/>
+                <a:ea typeface="Aptos" pitchFamily="34" charset="-122"/>
+                <a:cs typeface="Aptos" pitchFamily="34" charset="-120"/>
+              </a:rPr>
+              <a:t>Combined trees 3.266 / 3.109</a:t>
+            </a:r>
+            <a:endParaRPr lang="en-US" sz="1050" dirty="0"/>
+          </a:p>
+        </p:txBody>
+      </p:sp>
+      <p:sp>
+        <p:nvSpPr>
+          <p:cNvPr id="14" name="Text 10"/>
+          <p:cNvSpPr/>
+          <p:nvPr/>
+        </p:nvSpPr>
+        <p:spPr>
+          <a:xfrm>
+            <a:off x="621792" y="5449824"/>
+            <a:ext cx="6400800" cy="457200"/>
+          </a:xfrm>
+          <a:prstGeom prst="rect">
+            <a:avLst/>
+          </a:prstGeom>
+          <a:noFill/>
+          <a:ln/>
+        </p:spPr>
+        <p:txBody>
+          <a:bodyPr wrap="square" lIns="0" tIns="0" rIns="0" bIns="0" rtlCol="0" anchor="t"/>
+          <a:lstStyle/>
+          <a:p>
+            <a:pPr algn="ctr" indent="0" marL="0">
+              <a:buNone/>
+            </a:pPr>
+            <a:r>
+              <a:rPr lang="en-US" sz="1000" dirty="0">
+                <a:solidFill>
+                  <a:srgbClr val="667085"/>
+                </a:solidFill>
+                <a:latin typeface="Aptos" pitchFamily="34" charset="0"/>
+                <a:ea typeface="Aptos" pitchFamily="34" charset="-122"/>
+                <a:cs typeface="Aptos" pitchFamily="34" charset="-120"/>
+              </a:rPr>
+              <a:t>Shape 4.249 / 5.693 · rank 3.726 / 5.227</a:t>
+            </a:r>
+            <a:endParaRPr lang="en-US" sz="1000" dirty="0"/>
+          </a:p>
+          <a:p>
+            <a:pPr algn="ctr" indent="0" marL="0">
+              <a:buNone/>
+            </a:pPr>
+            <a:r>
+              <a:rPr lang="en-US" sz="1000" dirty="0">
+                <a:solidFill>
+                  <a:srgbClr val="667085"/>
+                </a:solidFill>
+                <a:latin typeface="Aptos" pitchFamily="34" charset="0"/>
+                <a:ea typeface="Aptos" pitchFamily="34" charset="-122"/>
+                <a:cs typeface="Aptos" pitchFamily="34" charset="-120"/>
+              </a:rPr>
+              <a:t>2,537 modern / 3,515 legacy rows; same near-group splits.</a:t>
+            </a:r>
+            <a:endParaRPr lang="en-US" sz="1000" dirty="0"/>
+          </a:p>
+        </p:txBody>
+      </p:sp>
+      <p:sp>
+        <p:nvSpPr>
+          <p:cNvPr id="15" name="Text 11"/>
+          <p:cNvSpPr/>
+          <p:nvPr/>
+        </p:nvSpPr>
+        <p:spPr>
+          <a:xfrm>
+            <a:off x="621792" y="6007608"/>
+            <a:ext cx="10899648" cy="384048"/>
+          </a:xfrm>
+          <a:prstGeom prst="roundRect">
+            <a:avLst>
+              <a:gd name="adj" fmla="val 11905"/>
+            </a:avLst>
+          </a:prstGeom>
+          <a:solidFill>
             <a:srgbClr val="FFF4C7"/>
           </a:solidFill>
           <a:ln w="10160">
@@ -11392,14 +11046,14 @@
           </a:ln>
         </p:spPr>
         <p:txBody>
-          <a:bodyPr wrap="square" lIns="1778" tIns="1778" rIns="1778" bIns="1778" rtlCol="0" anchor="ctr"/>
+          <a:bodyPr wrap="square" lIns="762" tIns="762" rIns="762" bIns="762" rtlCol="0" anchor="ctr"/>
           <a:lstStyle/>
           <a:p>
             <a:pPr algn="ctr" indent="0" marL="0">
               <a:buNone/>
             </a:pPr>
             <a:r>
-              <a:rPr lang="en-US" sz="1010" b="1" dirty="0">
+              <a:rPr lang="en-US" sz="1000" b="1" dirty="0">
                 <a:solidFill>
                   <a:srgbClr val="14213D"/>
                 </a:solidFill>
@@ -11407,9 +11061,9 @@
                 <a:ea typeface="Aptos" pitchFamily="34" charset="-122"/>
                 <a:cs typeface="Aptos" pitchFamily="34" charset="-120"/>
               </a:rPr>
-              <a:t>These results cover models with similar weight summaries in training. The next test removes complete weight groups.</a:t>
-            </a:r>
-            <a:endParaRPr lang="en-US" sz="1010" dirty="0"/>
+              <a:t>Alpha-specific gain is not established. Combined = alpha plus other matrix measurements; individual-task checks do not replace the controls.</a:t>
+            </a:r>
+            <a:endParaRPr lang="en-US" sz="1000" dirty="0"/>
           </a:p>
         </p:txBody>
       </p:sp>
@@ -11551,7 +11205,7 @@
               <a:buNone/>
             </a:pPr>
             <a:r>
-              <a:rPr lang="en-US" sz="900" b="1" spc="110" kern="0" dirty="0">
+              <a:rPr lang="en-US" sz="900" b="1" dirty="0">
                 <a:solidFill>
                   <a:srgbClr val="B42318"/>
                 </a:solidFill>
@@ -11598,7 +11252,7 @@
                 <a:ea typeface="Aptos Display" pitchFamily="34" charset="-122"/>
                 <a:cs typeface="Aptos Display" pitchFamily="34" charset="-120"/>
               </a:rPr>
-              <a:t>Holding out a model's entire weight group reveals the limit</a:t>
+              <a:t>Unseen groups and collections expose larger errors</a:t>
             </a:r>
             <a:endParaRPr lang="en-US" sz="2500" dirty="0"/>
           </a:p>
@@ -11683,7 +11337,7 @@
                 <a:ea typeface="Aptos" pitchFamily="34" charset="-122"/>
                 <a:cs typeface="Aptos" pitchFamily="34" charset="-120"/>
               </a:rPr>
-              <a:t>Sources: weight_only_2a5abfeb98dc33d9662c/performance_cluster_holdout_metrics.csv and performance_cluster_holdout_predictions.csv</a:t>
+              <a:t>Sources: reassessment_0063666fd5733b453c38/performance_metrics.csv; audit prediction_metrics_audit.csv and collection_direction_metrics.csv</a:t>
             </a:r>
             <a:endParaRPr lang="en-US" sz="660" dirty="0"/>
           </a:p>
@@ -11730,7 +11384,7 @@
       </p:sp>
       <p:pic>
         <p:nvPicPr>
-          <p:cNvPr id="11" name="Image 0" descr="/scratch/kinshuk/Model-Research/deliverables/htsr_model_zoo_deck/assets/performance_stress.png">    </p:cNvPr>
+          <p:cNvPr id="11" name="Image 0" descr="/scratch/kinshuk/Model-Research/deliverables/htsr_model_zoo_deck/assets/review_stress.png">    </p:cNvPr>
           <p:cNvPicPr>
             <a:picLocks noChangeAspect="1"/>
           </p:cNvPicPr>
@@ -11744,52 +11398,223 @@
         </p:blipFill>
         <p:spPr>
           <a:xfrm>
-            <a:off x="402336" y="1994419"/>
-            <a:ext cx="6583680" cy="3436091"/>
+            <a:off x="402336" y="1924885"/>
+            <a:ext cx="6986016" cy="3575158"/>
           </a:xfrm>
           <a:prstGeom prst="rect">
             <a:avLst/>
           </a:prstGeom>
         </p:spPr>
       </p:pic>
-      <p:pic>
-        <p:nvPicPr>
-          <p:cNvPr id="12" name="Image 1" descr="/scratch/kinshuk/Model-Research/deliverables/htsr_model_zoo_deck/assets/modern_prediction_scatter.png">    </p:cNvPr>
-          <p:cNvPicPr>
-            <a:picLocks noChangeAspect="1"/>
-          </p:cNvPicPr>
-          <p:nvPr/>
-        </p:nvPicPr>
-        <p:blipFill>
-          <a:blip r:embed="rId2"/>
-          <a:stretch>
-            <a:fillRect/>
-          </a:stretch>
-        </p:blipFill>
-        <p:spPr>
-          <a:xfrm>
-            <a:off x="7086600" y="1324484"/>
-            <a:ext cx="4617720" cy="2425951"/>
-          </a:xfrm>
-          <a:prstGeom prst="rect">
-            <a:avLst/>
-          </a:prstGeom>
-        </p:spPr>
-      </p:pic>
-      <p:sp>
-        <p:nvSpPr>
-          <p:cNvPr id="13" name="Text 9"/>
-          <p:cNvSpPr/>
-          <p:nvPr/>
-        </p:nvSpPr>
-        <p:spPr>
-          <a:xfrm>
-            <a:off x="7360920" y="4151376"/>
-            <a:ext cx="1874520" cy="1078992"/>
+      <p:sp>
+        <p:nvSpPr>
+          <p:cNvPr id="12" name="Text 9"/>
+          <p:cNvSpPr/>
+          <p:nvPr/>
+        </p:nvSpPr>
+        <p:spPr>
+          <a:xfrm>
+            <a:off x="7635240" y="1298448"/>
+            <a:ext cx="3721608" cy="402336"/>
+          </a:xfrm>
+          <a:prstGeom prst="rect">
+            <a:avLst/>
+          </a:prstGeom>
+          <a:noFill/>
+          <a:ln/>
+        </p:spPr>
+        <p:txBody>
+          <a:bodyPr wrap="square" lIns="0" tIns="0" rIns="0" bIns="0" rtlCol="0" anchor="t"/>
+          <a:lstStyle/>
+          <a:p>
+            <a:pPr indent="0" marL="0">
+              <a:buNone/>
+            </a:pPr>
+            <a:r>
+              <a:rPr lang="en-US" sz="1080" b="1" dirty="0">
+                <a:solidFill>
+                  <a:srgbClr val="003B95"/>
+                </a:solidFill>
+                <a:latin typeface="Aptos" pitchFamily="34" charset="0"/>
+                <a:ea typeface="Aptos" pitchFamily="34" charset="-122"/>
+                <a:cs typeface="Aptos" pitchFamily="34" charset="-120"/>
+              </a:rPr>
+              <a:t>NON-ALPHA RIDGE · WHOLE-GROUP MAE</a:t>
+            </a:r>
+            <a:endParaRPr lang="en-US" sz="1080" dirty="0"/>
+          </a:p>
+        </p:txBody>
+      </p:sp>
+      <p:sp>
+        <p:nvSpPr>
+          <p:cNvPr id="13" name="Text 10"/>
+          <p:cNvSpPr/>
+          <p:nvPr/>
+        </p:nvSpPr>
+        <p:spPr>
+          <a:xfrm>
+            <a:off x="7635240" y="1865376"/>
+            <a:ext cx="1673352" cy="438912"/>
+          </a:xfrm>
+          <a:prstGeom prst="rect">
+            <a:avLst/>
+          </a:prstGeom>
+          <a:noFill/>
+          <a:ln/>
+        </p:spPr>
+        <p:txBody>
+          <a:bodyPr wrap="square" lIns="0" tIns="0" rIns="0" bIns="0" rtlCol="0" anchor="t"/>
+          <a:lstStyle/>
+          <a:p>
+            <a:pPr indent="0" marL="0">
+              <a:buNone/>
+            </a:pPr>
+            <a:r>
+              <a:rPr lang="en-US" sz="2700" b="1" dirty="0">
+                <a:solidFill>
+                  <a:srgbClr val="003B95"/>
+                </a:solidFill>
+                <a:latin typeface="Aptos Display" pitchFamily="34" charset="0"/>
+                <a:ea typeface="Aptos Display" pitchFamily="34" charset="-122"/>
+                <a:cs typeface="Aptos Display" pitchFamily="34" charset="-120"/>
+              </a:rPr>
+              <a:t>6.561</a:t>
+            </a:r>
+            <a:endParaRPr lang="en-US" sz="2700" dirty="0"/>
+          </a:p>
+        </p:txBody>
+      </p:sp>
+      <p:sp>
+        <p:nvSpPr>
+          <p:cNvPr id="14" name="Text 11"/>
+          <p:cNvSpPr/>
+          <p:nvPr/>
+        </p:nvSpPr>
+        <p:spPr>
+          <a:xfrm>
+            <a:off x="7635240" y="2350008"/>
+            <a:ext cx="1673352" cy="292608"/>
+          </a:xfrm>
+          <a:prstGeom prst="rect">
+            <a:avLst/>
+          </a:prstGeom>
+          <a:noFill/>
+          <a:ln/>
+        </p:spPr>
+        <p:txBody>
+          <a:bodyPr wrap="square" lIns="0" tIns="0" rIns="0" bIns="0" rtlCol="0" anchor="t"/>
+          <a:lstStyle/>
+          <a:p>
+            <a:pPr indent="0" marL="0">
+              <a:buNone/>
+            </a:pPr>
+            <a:r>
+              <a:rPr lang="en-US" sz="1050" b="1" dirty="0">
+                <a:solidFill>
+                  <a:srgbClr val="14213D"/>
+                </a:solidFill>
+                <a:latin typeface="Aptos" pitchFamily="34" charset="0"/>
+                <a:ea typeface="Aptos" pitchFamily="34" charset="-122"/>
+                <a:cs typeface="Aptos" pitchFamily="34" charset="-120"/>
+              </a:rPr>
+              <a:t>modern</a:t>
+            </a:r>
+            <a:endParaRPr lang="en-US" sz="1050" dirty="0"/>
+          </a:p>
+        </p:txBody>
+      </p:sp>
+      <p:sp>
+        <p:nvSpPr>
+          <p:cNvPr id="15" name="Text 12"/>
+          <p:cNvSpPr/>
+          <p:nvPr/>
+        </p:nvSpPr>
+        <p:spPr>
+          <a:xfrm>
+            <a:off x="9665208" y="1865376"/>
+            <a:ext cx="1673352" cy="438912"/>
+          </a:xfrm>
+          <a:prstGeom prst="rect">
+            <a:avLst/>
+          </a:prstGeom>
+          <a:noFill/>
+          <a:ln/>
+        </p:spPr>
+        <p:txBody>
+          <a:bodyPr wrap="square" lIns="0" tIns="0" rIns="0" bIns="0" rtlCol="0" anchor="t"/>
+          <a:lstStyle/>
+          <a:p>
+            <a:pPr indent="0" marL="0">
+              <a:buNone/>
+            </a:pPr>
+            <a:r>
+              <a:rPr lang="en-US" sz="2700" b="1" dirty="0">
+                <a:solidFill>
+                  <a:srgbClr val="00693E"/>
+                </a:solidFill>
+                <a:latin typeface="Aptos Display" pitchFamily="34" charset="0"/>
+                <a:ea typeface="Aptos Display" pitchFamily="34" charset="-122"/>
+                <a:cs typeface="Aptos Display" pitchFamily="34" charset="-120"/>
+              </a:rPr>
+              <a:t>6.873</a:t>
+            </a:r>
+            <a:endParaRPr lang="en-US" sz="2700" dirty="0"/>
+          </a:p>
+        </p:txBody>
+      </p:sp>
+      <p:sp>
+        <p:nvSpPr>
+          <p:cNvPr id="16" name="Text 13"/>
+          <p:cNvSpPr/>
+          <p:nvPr/>
+        </p:nvSpPr>
+        <p:spPr>
+          <a:xfrm>
+            <a:off x="9665208" y="2350008"/>
+            <a:ext cx="1673352" cy="292608"/>
+          </a:xfrm>
+          <a:prstGeom prst="rect">
+            <a:avLst/>
+          </a:prstGeom>
+          <a:noFill/>
+          <a:ln/>
+        </p:spPr>
+        <p:txBody>
+          <a:bodyPr wrap="square" lIns="0" tIns="0" rIns="0" bIns="0" rtlCol="0" anchor="t"/>
+          <a:lstStyle/>
+          <a:p>
+            <a:pPr indent="0" marL="0">
+              <a:buNone/>
+            </a:pPr>
+            <a:r>
+              <a:rPr lang="en-US" sz="1050" b="1" dirty="0">
+                <a:solidFill>
+                  <a:srgbClr val="14213D"/>
+                </a:solidFill>
+                <a:latin typeface="Aptos" pitchFamily="34" charset="0"/>
+                <a:ea typeface="Aptos" pitchFamily="34" charset="-122"/>
+                <a:cs typeface="Aptos" pitchFamily="34" charset="-120"/>
+              </a:rPr>
+              <a:t>legacy</a:t>
+            </a:r>
+            <a:endParaRPr lang="en-US" sz="1050" dirty="0"/>
+          </a:p>
+        </p:txBody>
+      </p:sp>
+      <p:sp>
+        <p:nvSpPr>
+          <p:cNvPr id="17" name="Text 14"/>
+          <p:cNvSpPr/>
+          <p:nvPr/>
+        </p:nvSpPr>
+        <p:spPr>
+          <a:xfrm>
+            <a:off x="7635240" y="3127248"/>
+            <a:ext cx="3703320" cy="886968"/>
           </a:xfrm>
           <a:prstGeom prst="roundRect">
             <a:avLst>
-              <a:gd name="adj" fmla="val 4237"/>
+              <a:gd name="adj" fmla="val 5155"/>
             </a:avLst>
           </a:prstGeom>
           <a:solidFill>
@@ -11809,7 +11634,7 @@
               <a:buNone/>
             </a:pPr>
             <a:r>
-              <a:rPr lang="en-US" sz="1040" b="1" dirty="0">
+              <a:rPr lang="en-US" sz="1050" b="1" dirty="0">
                 <a:solidFill>
                   <a:srgbClr val="14213D"/>
                 </a:solidFill>
@@ -11817,60 +11642,26 @@
                 <a:ea typeface="Aptos" pitchFamily="34" charset="-122"/>
                 <a:cs typeface="Aptos" pitchFamily="34" charset="-120"/>
               </a:rPr>
-              <a:t>MODERN TASKS</a:t>
-            </a:r>
-            <a:endParaRPr lang="en-US" sz="1040" dirty="0"/>
-          </a:p>
-          <a:p>
-            <a:pPr algn="ctr" indent="0" marL="0">
-              <a:buNone/>
-            </a:pPr>
-            <a:r>
-              <a:rPr lang="en-US" sz="1040" b="1" dirty="0">
-                <a:solidFill>
-                  <a:srgbClr val="14213D"/>
-                </a:solidFill>
-                <a:latin typeface="Aptos" pitchFamily="34" charset="0"/>
-                <a:ea typeface="Aptos" pitchFamily="34" charset="-122"/>
-                <a:cs typeface="Aptos" pitchFamily="34" charset="-120"/>
-              </a:rPr>
-              <a:t>MAE 7.721 · Spearman 0.479</a:t>
-            </a:r>
-            <a:endParaRPr lang="en-US" sz="1040" dirty="0"/>
-          </a:p>
-          <a:p>
-            <a:pPr algn="ctr" indent="0" marL="0">
-              <a:buNone/>
-            </a:pPr>
-            <a:r>
-              <a:rPr lang="en-US" sz="1040" b="1" dirty="0">
-                <a:solidFill>
-                  <a:srgbClr val="14213D"/>
-                </a:solidFill>
-                <a:latin typeface="Aptos" pitchFamily="34" charset="0"/>
-                <a:ea typeface="Aptos" pitchFamily="34" charset="-122"/>
-                <a:cs typeface="Aptos" pitchFamily="34" charset="-120"/>
-              </a:rPr>
-              <a:t>training average 9.102</a:t>
-            </a:r>
-            <a:endParaRPr lang="en-US" sz="1040" dirty="0"/>
-          </a:p>
-        </p:txBody>
-      </p:sp>
-      <p:sp>
-        <p:nvSpPr>
-          <p:cNvPr id="14" name="Text 10"/>
-          <p:cNvSpPr/>
-          <p:nvPr/>
-        </p:nvSpPr>
-        <p:spPr>
-          <a:xfrm>
-            <a:off x="9454896" y="4151376"/>
-            <a:ext cx="1874520" cy="1078992"/>
+              <a:t>Whole weight clusters are held out together. This is a shift test, not the near-group interpolation test; compare each method with the training median.</a:t>
+            </a:r>
+            <a:endParaRPr lang="en-US" sz="1050" dirty="0"/>
+          </a:p>
+        </p:txBody>
+      </p:sp>
+      <p:sp>
+        <p:nvSpPr>
+          <p:cNvPr id="18" name="Text 15"/>
+          <p:cNvSpPr/>
+          <p:nvPr/>
+        </p:nvSpPr>
+        <p:spPr>
+          <a:xfrm>
+            <a:off x="7635240" y="4352544"/>
+            <a:ext cx="3703320" cy="987552"/>
           </a:xfrm>
           <a:prstGeom prst="roundRect">
             <a:avLst>
-              <a:gd name="adj" fmla="val 4237"/>
+              <a:gd name="adj" fmla="val 4630"/>
             </a:avLst>
           </a:prstGeom>
           <a:solidFill>
@@ -11898,7 +11689,7 @@
                 <a:ea typeface="Aptos" pitchFamily="34" charset="-122"/>
                 <a:cs typeface="Aptos" pitchFamily="34" charset="-120"/>
               </a:rPr>
-              <a:t>LEGACY TASKS</a:t>
+              <a:t>COLLECTION-HOLDOUT WARNING</a:t>
             </a:r>
             <a:endParaRPr lang="en-US" sz="1040" dirty="0"/>
           </a:p>
@@ -11915,16 +11706,38 @@
                 <a:ea typeface="Aptos" pitchFamily="34" charset="-122"/>
                 <a:cs typeface="Aptos" pitchFamily="34" charset="-120"/>
               </a:rPr>
-              <a:t>MAE 14.169 · Spearman 0.032</a:t>
+              <a:t>Combined ridge produces 26 modern predictions outside 0-100. These are range failures, not plausible benchmark forecasts.</a:t>
             </a:r>
             <a:endParaRPr lang="en-US" sz="1040" dirty="0"/>
           </a:p>
+        </p:txBody>
+      </p:sp>
+      <p:sp>
+        <p:nvSpPr>
+          <p:cNvPr id="19" name="Text 16"/>
+          <p:cNvSpPr/>
+          <p:nvPr/>
+        </p:nvSpPr>
+        <p:spPr>
+          <a:xfrm>
+            <a:off x="7635240" y="5660136"/>
+            <a:ext cx="3703320" cy="512064"/>
+          </a:xfrm>
+          <a:prstGeom prst="rect">
+            <a:avLst/>
+          </a:prstGeom>
+          <a:noFill/>
+          <a:ln/>
+        </p:spPr>
+        <p:txBody>
+          <a:bodyPr wrap="square" lIns="0" tIns="0" rIns="0" bIns="0" rtlCol="0" anchor="t"/>
+          <a:lstStyle/>
           <a:p>
             <a:pPr algn="ctr" indent="0" marL="0">
               <a:buNone/>
             </a:pPr>
             <a:r>
-              <a:rPr lang="en-US" sz="1040" b="1" dirty="0">
+              <a:rPr lang="en-US" sz="1020" b="1" dirty="0">
                 <a:solidFill>
                   <a:srgbClr val="B42318"/>
                 </a:solidFill>
@@ -11932,46 +11745,7 @@
                 <a:ea typeface="Aptos" pitchFamily="34" charset="-122"/>
                 <a:cs typeface="Aptos" pitchFamily="34" charset="-120"/>
               </a:rPr>
-              <a:t>training average 13.182</a:t>
-            </a:r>
-            <a:endParaRPr lang="en-US" sz="1040" dirty="0"/>
-          </a:p>
-        </p:txBody>
-      </p:sp>
-      <p:sp>
-        <p:nvSpPr>
-          <p:cNvPr id="15" name="Text 11"/>
-          <p:cNvSpPr/>
-          <p:nvPr/>
-        </p:nvSpPr>
-        <p:spPr>
-          <a:xfrm>
-            <a:off x="7333488" y="5532120"/>
-            <a:ext cx="4023360" cy="548640"/>
-          </a:xfrm>
-          <a:prstGeom prst="rect">
-            <a:avLst/>
-          </a:prstGeom>
-          <a:noFill/>
-          <a:ln/>
-        </p:spPr>
-        <p:txBody>
-          <a:bodyPr wrap="square" lIns="0" tIns="0" rIns="0" bIns="0" rtlCol="0" anchor="t"/>
-          <a:lstStyle/>
-          <a:p>
-            <a:pPr algn="ctr" indent="0" marL="0">
-              <a:buNone/>
-            </a:pPr>
-            <a:r>
-              <a:rPr lang="en-US" sz="1020" b="1" dirty="0">
-                <a:solidFill>
-                  <a:srgbClr val="B42318"/>
-                </a:solidFill>
-                <a:latin typeface="Aptos" pitchFamily="34" charset="0"/>
-                <a:ea typeface="Aptos" pitchFamily="34" charset="-122"/>
-                <a:cs typeface="Aptos" pitchFamily="34" charset="-120"/>
-              </a:rPr>
-              <a:t>For legacy tasks, this is worse than using the training-set average. Similarity must be checked before trusting a score estimate.</a:t>
+              <a:t>Errors change across held-out groups and collections. Inspect the score range and coverage, not only average error.</a:t>
             </a:r>
             <a:endParaRPr lang="en-US" sz="1020" dirty="0"/>
           </a:p>
@@ -12115,7 +11889,7 @@
               <a:buNone/>
             </a:pPr>
             <a:r>
-              <a:rPr lang="en-US" sz="900" b="1" spc="110" kern="0" dirty="0">
+              <a:rPr lang="en-US" sz="900" b="1" dirty="0">
                 <a:solidFill>
                   <a:srgbClr val="002676"/>
                 </a:solidFill>
@@ -12162,7 +11936,7 @@
                 <a:ea typeface="Aptos Display" pitchFamily="34" charset="-122"/>
                 <a:cs typeface="Aptos Display" pitchFamily="34" charset="-120"/>
               </a:rPr>
-              <a:t>What the results show, and where uncertainty remains</a:t>
+              <a:t>Keep rank grouping, test Trace bases, and retain non-alpha controls</a:t>
             </a:r>
             <a:endParaRPr lang="en-US" sz="2500" dirty="0"/>
           </a:p>
@@ -12247,7 +12021,7 @@
                 <a:ea typeface="Aptos" pitchFamily="34" charset="-122"/>
                 <a:cs typeface="Aptos" pitchFamily="34" charset="-120"/>
               </a:rPr>
-              <a:t>Summary of the frozen lineage and performance evaluations in the completed run.</a:t>
+              <a:t>Sources: reassessment_0063666fd5733b453c38/protocol.json, audit tables, and frozen lineage evaluation</a:t>
             </a:r>
             <a:endParaRPr lang="en-US" sz="660" dirty="0"/>
           </a:p>
@@ -12325,7 +12099,7 @@
                 <a:ea typeface="Aptos" pitchFamily="34" charset="-122"/>
                 <a:cs typeface="Aptos" pitchFamily="34" charset="-120"/>
               </a:rPr>
-              <a:t>Observed</a:t>
+              <a:t>Retain</a:t>
             </a:r>
             <a:endParaRPr lang="en-US" sz="1700" dirty="0"/>
           </a:p>
@@ -12395,7 +12169,7 @@
                 <a:ea typeface="Aptos" pitchFamily="34" charset="-122"/>
                 <a:cs typeface="Aptos" pitchFamily="34" charset="-120"/>
               </a:rPr>
-              <a:t>17 repeatable weight-derived groups</a:t>
+              <a:t>Keep layer-wise grouping: all-matrix summaries cover more models but separate families poorly</a:t>
             </a:r>
             <a:endParaRPr lang="en-US" sz="1070" dirty="0"/>
           </a:p>
@@ -12442,7 +12216,7 @@
                 <a:ea typeface="Aptos" pitchFamily="34" charset="-122"/>
                 <a:cs typeface="Aptos" pitchFamily="34" charset="-120"/>
               </a:rPr>
-              <a:t>Known base appears in top 3 for 98.4%</a:t>
+              <a:t>Trace as a base-retrieval comparison, with fixed gallery and tie diagnostics</a:t>
             </a:r>
             <a:endParaRPr lang="en-US" sz="1070" dirty="0"/>
           </a:p>
@@ -12489,7 +12263,7 @@
                 <a:ea typeface="Aptos" pitchFamily="34" charset="-122"/>
                 <a:cs typeface="Aptos" pitchFamily="34" charset="-120"/>
               </a:rPr>
-              <a:t>Modern-score error is 3.043 in the ordinary test</a:t>
+              <a:t>Non-alpha trees as baseline: MAE 3.211 modern / 3.068 legacy</a:t>
             </a:r>
             <a:endParaRPr lang="en-US" sz="1070" dirty="0"/>
           </a:p>
@@ -12598,7 +12372,7 @@
                 <a:ea typeface="Aptos" pitchFamily="34" charset="-122"/>
                 <a:cs typeface="Aptos" pitchFamily="34" charset="-120"/>
               </a:rPr>
-              <a:t>Alpha order through depth contains family information</a:t>
+              <a:t>Ranks discard magnitude; direct measurements predict scores better</a:t>
             </a:r>
             <a:endParaRPr lang="en-US" sz="1070" dirty="0"/>
           </a:p>
@@ -12645,7 +12419,7 @@
                 <a:ea typeface="Aptos" pitchFamily="34" charset="-122"/>
                 <a:cs typeface="Aptos" pitchFamily="34" charset="-120"/>
               </a:rPr>
-              <a:t>Broad families are easier than exact checkpoint ancestry</a:t>
+              <a:t>Adding alpha did not improve the key spectral controls</a:t>
             </a:r>
             <a:endParaRPr lang="en-US" sz="1070" dirty="0"/>
           </a:p>
@@ -12692,7 +12466,7 @@
                 <a:ea typeface="Aptos" pitchFamily="34" charset="-122"/>
                 <a:cs typeface="Aptos" pitchFamily="34" charset="-120"/>
               </a:rPr>
-              <a:t>Score estimates depend on nearby training examples</a:t>
+              <a:t>Local prediction and broad grouping are distinct from historical ancestry</a:t>
             </a:r>
             <a:endParaRPr lang="en-US" sz="1070" dirty="0"/>
           </a:p>
@@ -12801,7 +12575,7 @@
                 <a:ea typeface="Aptos" pitchFamily="34" charset="-122"/>
                 <a:cs typeface="Aptos" pitchFamily="34" charset="-120"/>
               </a:rPr>
-              <a:t>Similarity cannot establish parent or training direction</a:t>
+              <a:t>Repository-ID source joins do not verify the analyzed checkpoint revision</a:t>
             </a:r>
             <a:endParaRPr lang="en-US" sz="1070" dirty="0"/>
           </a:p>
@@ -12848,7 +12622,7 @@
                 <a:ea typeface="Aptos" pitchFamily="34" charset="-122"/>
                 <a:cs typeface="Aptos" pitchFamily="34" charset="-120"/>
               </a:rPr>
-              <a:t>A base absent from the candidate list cannot be returned</a:t>
+              <a:t>Missing bases and near-tied candidates limit exact-ID retrieval</a:t>
             </a:r>
             <a:endParaRPr lang="en-US" sz="1070" dirty="0"/>
           </a:p>
@@ -12895,7 +12669,7 @@
                 <a:ea typeface="Aptos" pitchFamily="34" charset="-122"/>
                 <a:cs typeface="Aptos" pitchFamily="34" charset="-120"/>
               </a:rPr>
-              <a:t>Legacy errors exceed the mean baseline when a whole group is unseen</a:t>
+              <a:t>Whole-group shifts worsen errors; collection-shift ridge can leave 0-100</a:t>
             </a:r>
             <a:endParaRPr lang="en-US" sz="1070" dirty="0"/>
           </a:p>
@@ -12942,7 +12716,7 @@
                 <a:ea typeface="Aptos" pitchFamily="34" charset="-122"/>
                 <a:cs typeface="Aptos" pitchFamily="34" charset="-120"/>
               </a:rPr>
-              <a:t>Overall: weight-derived alpha summaries support broad grouping, known-base matching, and local score estimation. Exact ancestry needs an additional direct weight-matrix check.</a:t>
+              <a:t>Exploratory evidence, not an untouched replication. Before deployment: verify checkpoint revisions, test external roots, and calibrate rejection on separate data.</a:t>
             </a:r>
             <a:endParaRPr lang="en-US" sz="1120" dirty="0"/>
           </a:p>
@@ -13086,7 +12860,7 @@
               <a:buNone/>
             </a:pPr>
             <a:r>
-              <a:rPr lang="en-US" sz="1000" b="1" spc="150" kern="0" dirty="0">
+              <a:rPr lang="en-US" sz="1000" b="1" dirty="0">
                 <a:solidFill>
                   <a:srgbClr val="FDB515"/>
                 </a:solidFill>
@@ -13759,7 +13533,7 @@
               <a:buNone/>
             </a:pPr>
             <a:r>
-              <a:rPr lang="en-US" sz="900" b="1" spc="110" kern="0" dirty="0">
+              <a:rPr lang="en-US" sz="900" b="1" dirty="0">
                 <a:solidFill>
                   <a:srgbClr val="003B95"/>
                 </a:solidFill>
@@ -15297,7 +15071,7 @@
               <a:buNone/>
             </a:pPr>
             <a:r>
-              <a:rPr lang="en-US" sz="900" b="1" spc="110" kern="0" dirty="0">
+              <a:rPr lang="en-US" sz="900" b="1" dirty="0">
                 <a:solidFill>
                   <a:srgbClr val="00693E"/>
                 </a:solidFill>
@@ -15344,7 +15118,7 @@
                 <a:ea typeface="Aptos Display" pitchFamily="34" charset="-122"/>
                 <a:cs typeface="Aptos Display" pitchFamily="34" charset="-120"/>
               </a:rPr>
-              <a:t>Each weight matrix becomes a fitted spectrum and a structured record</a:t>
+              <a:t>From weight matrices to saved spectral measurements</a:t>
             </a:r>
             <a:endParaRPr lang="en-US" sz="2500" dirty="0"/>
           </a:p>
@@ -16630,7 +16404,7 @@
               <a:buNone/>
             </a:pPr>
             <a:r>
-              <a:rPr lang="en-US" sz="900" b="1" spc="110" kern="0" dirty="0">
+              <a:rPr lang="en-US" sz="900" b="1" dirty="0">
                 <a:solidFill>
                   <a:srgbClr val="002676"/>
                 </a:solidFill>
@@ -16677,7 +16451,7 @@
                 <a:ea typeface="Aptos Display" pitchFamily="34" charset="-122"/>
                 <a:cs typeface="Aptos Display" pitchFamily="34" charset="-120"/>
               </a:rPr>
-              <a:t>Make predictions first; use descriptive metadata only to check them</a:t>
+              <a:t>Keep predictor inputs separate from evaluation labels</a:t>
             </a:r>
             <a:endParaRPr lang="en-US" sz="2500" dirty="0"/>
           </a:p>
@@ -16762,7 +16536,7 @@
                 <a:ea typeface="Aptos" pitchFamily="34" charset="-122"/>
                 <a:cs typeface="Aptos" pitchFamily="34" charset="-120"/>
               </a:rPr>
-              <a:t>Source: weight_only_2a5abfeb98dc33d9662c/metadata.json</a:t>
+              <a:t>Sources: reassessment_0063666fd5733b453c38/protocol.json; parent prediction freezes</a:t>
             </a:r>
             <a:endParaRPr lang="en-US" sz="660" dirty="0"/>
           </a:p>
@@ -17286,7 +17060,7 @@
                 <a:ea typeface="Aptos" pitchFamily="34" charset="-122"/>
                 <a:cs typeface="Aptos" pitchFamily="34" charset="-120"/>
               </a:rPr>
-              <a:t>available roles + training scores</a:t>
+              <a:t>matrix summaries + training scores</a:t>
             </a:r>
             <a:endParaRPr lang="en-US" sz="1200" dirty="0"/>
           </a:p>
@@ -17421,7 +17195,7 @@
                 <a:ea typeface="Aptos" pitchFamily="34" charset="-122"/>
                 <a:cs typeface="Aptos" pitchFamily="34" charset="-120"/>
               </a:rPr>
-              <a:t>OPEN ONLY AFTER PREDICTION  |  lineage · family · architecture · model type · parameter count · source · ancestry graph · held-out score</a:t>
+              <a:t>EVALUATION ONLY  |  declared source roots and family labels score frozen lineage predictions; held-out benchmark scores score predictions</a:t>
             </a:r>
             <a:endParaRPr lang="en-US" sz="1100" dirty="0"/>
           </a:p>
@@ -17436,7 +17210,7 @@
         <p:spPr>
           <a:xfrm>
             <a:off x="603504" y="5623560"/>
-            <a:ext cx="10652760" cy="384048"/>
+            <a:ext cx="10652760" cy="493776"/>
           </a:xfrm>
           <a:prstGeom prst="rect">
             <a:avLst/>
@@ -17460,7 +17234,7 @@
                 <a:ea typeface="Aptos" pitchFamily="34" charset="-122"/>
                 <a:cs typeface="Aptos" pitchFamily="34" charset="-120"/>
               </a:rPr>
-              <a:t>Model IDs only join files. The base-candidate list defines the possible answers, as it does in the reference paper.</a:t>
+              <a:t>Collection metadata shaped selection; collection IDs define one holdout. IDs join records and break ties, not predictor features. This is exploratory reuse, not untouched confirmation.</a:t>
             </a:r>
             <a:endParaRPr lang="en-US" sz="1030" dirty="0"/>
           </a:p>
@@ -17604,7 +17378,7 @@
               <a:buNone/>
             </a:pPr>
             <a:r>
-              <a:rPr lang="en-US" sz="900" b="1" spc="110" kern="0" dirty="0">
+              <a:rPr lang="en-US" sz="900" b="1" dirty="0">
                 <a:solidFill>
                   <a:srgbClr val="00693E"/>
                 </a:solidFill>
@@ -17736,7 +17510,7 @@
                 <a:ea typeface="Aptos" pitchFamily="34" charset="-122"/>
                 <a:cs typeface="Aptos" pitchFamily="34" charset="-120"/>
               </a:rPr>
-              <a:t>Primary sources: arXiv:2608.07786, arXiv:2608.14929, arXiv:2510.06738.</a:t>
+              <a:t>Primary sources: https://arxiv.org/html/2608.07786v1; https://arxiv.org/html/2608.14929v1; https://arxiv.org/html/2510.06738v3</a:t>
             </a:r>
             <a:endParaRPr lang="en-US" sz="660" dirty="0"/>
           </a:p>
@@ -17839,7 +17613,7 @@
                 <a:ea typeface="Aptos" pitchFamily="34" charset="-122"/>
                 <a:cs typeface="Aptos" pitchFamily="34" charset="-120"/>
               </a:rPr>
-              <a:t>HTSR coarse retrieval</a:t>
+              <a:t>rank grouping + Trace retrieval</a:t>
             </a:r>
             <a:endParaRPr lang="en-US" sz="1300" dirty="0"/>
           </a:p>
@@ -17856,7 +17630,7 @@
                 <a:ea typeface="Aptos" pitchFamily="34" charset="-122"/>
                 <a:cs typeface="Aptos" pitchFamily="34" charset="-120"/>
               </a:rPr>
-              <a:t>10,946 assigned models</a:t>
+              <a:t>10,946 rank assignments</a:t>
             </a:r>
             <a:endParaRPr lang="en-US" sz="1300" dirty="0"/>
           </a:p>
@@ -18049,7 +17823,7 @@
                 <a:ea typeface="Aptos" pitchFamily="34" charset="-122"/>
                 <a:cs typeface="Aptos" pitchFamily="34" charset="-120"/>
               </a:rPr>
-              <a:t>related / unrelated evidence</a:t>
+              <a:t>relatedness evidence</a:t>
             </a:r>
             <a:endParaRPr lang="en-US" sz="1300" dirty="0"/>
           </a:p>
@@ -18066,7 +17840,7 @@
                 <a:ea typeface="Aptos" pitchFamily="34" charset="-122"/>
                 <a:cs typeface="Aptos" pitchFamily="34" charset="-120"/>
               </a:rPr>
-              <a:t>with calibrated thresholds</a:t>
+              <a:t>calibrate on separate pairs</a:t>
             </a:r>
             <a:endParaRPr lang="en-US" sz="1300" dirty="0"/>
           </a:p>
@@ -18167,7 +17941,7 @@
         <p:spPr>
           <a:xfrm>
             <a:off x="658368" y="4288536"/>
-            <a:ext cx="3090672" cy="621792"/>
+            <a:ext cx="3090672" cy="822960"/>
           </a:xfrm>
           <a:prstGeom prst="rect">
             <a:avLst/>
@@ -18183,7 +17957,7 @@
               <a:buNone/>
             </a:pPr>
             <a:r>
-              <a:rPr lang="en-US" sz="1000" dirty="0">
+              <a:rPr lang="en-US" sz="960" dirty="0">
                 <a:solidFill>
                   <a:srgbClr val="344054"/>
                 </a:solidFill>
@@ -18191,9 +17965,9 @@
                 <a:ea typeface="Aptos" pitchFamily="34" charset="-122"/>
                 <a:cs typeface="Aptos" pitchFamily="34" charset="-120"/>
               </a:rPr>
-              <a:t>Coarse family separation plus fine directional geometry.</a:t>
-            </a:r>
-            <a:endParaRPr lang="en-US" sz="1000" dirty="0"/>
+              <a:t>Trace tested from sqrt(norm). Fine directional comparison requires top singular vectors, not scalar summaries.</a:t>
+            </a:r>
+            <a:endParaRPr lang="en-US" sz="960" dirty="0"/>
           </a:p>
         </p:txBody>
       </p:sp>
@@ -18292,7 +18066,7 @@
         <p:spPr>
           <a:xfrm>
             <a:off x="4096512" y="4288536"/>
-            <a:ext cx="3090672" cy="621792"/>
+            <a:ext cx="3090672" cy="822960"/>
           </a:xfrm>
           <a:prstGeom prst="rect">
             <a:avLst/>
@@ -18308,7 +18082,7 @@
               <a:buNone/>
             </a:pPr>
             <a:r>
-              <a:rPr lang="en-US" sz="1000" dirty="0">
+              <a:rPr lang="en-US" sz="960" dirty="0">
                 <a:solidFill>
                   <a:srgbClr val="344054"/>
                 </a:solidFill>
@@ -18316,9 +18090,9 @@
                 <a:ea typeface="Aptos" pitchFamily="34" charset="-122"/>
                 <a:cs typeface="Aptos" pitchFamily="34" charset="-120"/>
               </a:rPr>
-              <a:t>Removes shared identity structure before comparing residual blocks.</a:t>
-            </a:r>
-            <a:endParaRPr lang="en-US" sz="1000" dirty="0"/>
+              <a:t>Center Wout Win by subtracting trace(M) I/d. Requires compatible blocks; symmetric similarity is not ancestry direction.</a:t>
+            </a:r>
+            <a:endParaRPr lang="en-US" sz="960" dirty="0"/>
           </a:p>
         </p:txBody>
       </p:sp>
@@ -18417,7 +18191,7 @@
         <p:spPr>
           <a:xfrm>
             <a:off x="7534656" y="4288536"/>
-            <a:ext cx="3090672" cy="621792"/>
+            <a:ext cx="3090672" cy="822960"/>
           </a:xfrm>
           <a:prstGeom prst="rect">
             <a:avLst/>
@@ -18433,7 +18207,7 @@
               <a:buNone/>
             </a:pPr>
             <a:r>
-              <a:rPr lang="en-US" sz="1000" dirty="0">
+              <a:rPr lang="en-US" sz="960" dirty="0">
                 <a:solidFill>
                   <a:srgbClr val="344054"/>
                 </a:solidFill>
@@ -18441,9 +18215,9 @@
                 <a:ea typeface="Aptos" pitchFamily="34" charset="-122"/>
                 <a:cs typeface="Aptos" pitchFamily="34" charset="-120"/>
               </a:rPr>
-              <a:t>Aligns matrices, then compares their centered weight structure.</a:t>
-            </a:r>
-            <a:endParaRPr lang="en-US" sz="1000" dirty="0"/>
+              <a:t>Embedding assignment and sign alignment, then Q/K unbiased CKA. Requires direct weights; not tested in this audit.</a:t>
+            </a:r>
+            <a:endParaRPr lang="en-US" sz="960" dirty="0"/>
           </a:p>
         </p:txBody>
       </p:sp>
@@ -18488,7 +18262,7 @@
                 <a:ea typeface="Aptos" pitchFamily="34" charset="-122"/>
                 <a:cs typeface="Aptos" pitchFamily="34" charset="-120"/>
               </a:rPr>
-              <a:t>Not tested here: the saved cache has scalar eigenvalue summaries, not singular vectors or centered weight matrices.</a:t>
+              <a:t>Trace is feasible from saved scalar norms and was tested. Directional, residual, and AWM checks still require unavailable direct-weight information; none alone proves historical ancestry.</a:t>
             </a:r>
             <a:endParaRPr lang="en-US" sz="1080" dirty="0"/>
           </a:p>
@@ -18632,7 +18406,7 @@
               <a:buNone/>
             </a:pPr>
             <a:r>
-              <a:rPr lang="en-US" sz="900" b="1" spc="110" kern="0" dirty="0">
+              <a:rPr lang="en-US" sz="900" b="1" dirty="0">
                 <a:solidFill>
                   <a:srgbClr val="003B95"/>
                 </a:solidFill>
@@ -19347,7 +19121,7 @@
                 <a:ea typeface="Aptos" pitchFamily="34" charset="-122"/>
                 <a:cs typeface="Aptos" pitchFamily="34" charset="-120"/>
               </a:rPr>
-              <a:t>Five-part test</a:t>
+              <a:t>Near-group test</a:t>
             </a:r>
             <a:endParaRPr lang="en-US" sz="1200" dirty="0"/>
           </a:p>
@@ -19386,7 +19160,7 @@
                 <a:ea typeface="Aptos" pitchFamily="34" charset="-122"/>
                 <a:cs typeface="Aptos" pitchFamily="34" charset="-120"/>
               </a:rPr>
-              <a:t>Divide models into five fixed parts; test each part using the other four.</a:t>
+              <a:t>Keep near-profile groups intact in five fixed parts; fit scores using the other four.</a:t>
             </a:r>
             <a:endParaRPr lang="en-US" sz="1030" dirty="0"/>
           </a:p>
@@ -19448,7 +19222,7 @@
                 <a:ea typeface="Aptos" pitchFamily="34" charset="-122"/>
                 <a:cs typeface="Aptos" pitchFamily="34" charset="-120"/>
               </a:rPr>
-              <a:t>Known-base test</a:t>
+              <a:t>Trace</a:t>
             </a:r>
             <a:endParaRPr lang="en-US" sz="1200" dirty="0"/>
           </a:p>
@@ -19487,7 +19261,7 @@
                 <a:ea typeface="Aptos" pitchFamily="34" charset="-122"/>
                 <a:cs typeface="Aptos" pitchFamily="34" charset="-120"/>
               </a:rPr>
-              <a:t>Choose the closest model from a fixed list of possible base checkpoints.</a:t>
+              <a:t>Mean role-wise Pearson of Frobenius depth profiles; resample to pair-max depth.</a:t>
             </a:r>
             <a:endParaRPr lang="en-US" sz="1030" dirty="0"/>
           </a:p>
@@ -19658,7 +19432,7 @@
                 <a:ea typeface="Aptos" pitchFamily="34" charset="-122"/>
                 <a:cs typeface="Aptos" pitchFamily="34" charset="-120"/>
               </a:rPr>
-              <a:t>Evidence boundary: model weights and benchmark training scores create predictions. Provenance and family metadata are opened only after predictions are saved, to measure correctness.</a:t>
+              <a:t>Evidence boundary: saved weight features plus training scores form predictions. Declared source links evaluate frozen retrieval; collection metadata shaped selection and one holdout. Checkpoint revision remains unverified.</a:t>
             </a:r>
             <a:endParaRPr lang="en-US" sz="1060" dirty="0"/>
           </a:p>
@@ -19802,7 +19576,7 @@
               <a:buNone/>
             </a:pPr>
             <a:r>
-              <a:rPr lang="en-US" sz="900" b="1" spc="110" kern="0" dirty="0">
+              <a:rPr lang="en-US" sz="900" b="1" dirty="0">
                 <a:solidFill>
                   <a:srgbClr val="002676"/>
                 </a:solidFill>
@@ -19934,7 +19708,7 @@
                 <a:ea typeface="Aptos" pitchFamily="34" charset="-122"/>
                 <a:cs typeface="Aptos" pitchFamily="34" charset="-120"/>
               </a:rPr>
-              <a:t>Sources: collection code, completed weight-only run, and post-prediction validation tables.</a:t>
+              <a:t>Sources: collection code, parent weight-only run, and exploratory reassessment protocol.</a:t>
             </a:r>
             <a:endParaRPr lang="en-US" sz="660" dirty="0"/>
           </a:p>
@@ -20194,7 +19968,7 @@
                 <a:ea typeface="Aptos" pitchFamily="34" charset="-122"/>
                 <a:cs typeface="Aptos" pitchFamily="34" charset="-120"/>
               </a:rPr>
-              <a:t>19,713 distinct models</a:t>
+              <a:t>19,713 selected records</a:t>
             </a:r>
             <a:endParaRPr lang="en-US" sz="1040" dirty="0"/>
           </a:p>
@@ -20841,7 +20615,7 @@
                 <a:ea typeface="Aptos" pitchFamily="34" charset="-122"/>
                 <a:cs typeface="Aptos" pitchFamily="34" charset="-120"/>
               </a:rPr>
-              <a:t>open provenance and held-out scores</a:t>
+              <a:t>score against declared source links</a:t>
             </a:r>
             <a:endParaRPr lang="en-US" sz="1070" dirty="0"/>
           </a:p>
@@ -20858,7 +20632,7 @@
                 <a:ea typeface="Aptos" pitchFamily="34" charset="-122"/>
                 <a:cs typeface="Aptos" pitchFamily="34" charset="-120"/>
               </a:rPr>
-              <a:t>measure agreement and error</a:t>
+              <a:t>measure held-out benchmark error</a:t>
             </a:r>
             <a:endParaRPr lang="en-US" sz="1070" dirty="0"/>
           </a:p>
@@ -20976,7 +20750,7 @@
                 <a:ea typeface="Aptos" pitchFamily="34" charset="-122"/>
                 <a:cs typeface="Aptos" pitchFamily="34" charset="-120"/>
               </a:rPr>
-              <a:t>The predictor sees model weights, the fixed candidate-base list, and training benchmark scores. Descriptive metadata is opened only in phase 4.</a:t>
+              <a:t>Predictor features come from saved weights; score fitting uses training outcomes. Collection metadata shaped curation and one holdout, so the full process is not metadata-free.</a:t>
             </a:r>
             <a:endParaRPr lang="en-US" sz="1100" dirty="0"/>
           </a:p>
@@ -21120,7 +20894,7 @@
               <a:buNone/>
             </a:pPr>
             <a:r>
-              <a:rPr lang="en-US" sz="900" b="1" spc="110" kern="0" dirty="0">
+              <a:rPr lang="en-US" sz="900" b="1" dirty="0">
                 <a:solidFill>
                   <a:srgbClr val="003B95"/>
                 </a:solidFill>
@@ -21448,7 +21222,7 @@
                 <a:ea typeface="Aptos" pitchFamily="34" charset="-122"/>
                 <a:cs typeface="Aptos" pitchFamily="34" charset="-120"/>
               </a:rPr>
-              <a:t>2  Normalize owner/repository and revision; keep one row per canonical checkpoint.</a:t>
+              <a:t>2  Normalize repository IDs and declared revision fields; the analyzed checkpoint revision is not verified.</a:t>
             </a:r>
             <a:endParaRPr lang="en-US" sz="920" dirty="0"/>
           </a:p>
@@ -21785,7 +21559,7 @@
                 <a:ea typeface="Aptos" pitchFamily="34" charset="-122"/>
                 <a:cs typeface="Aptos" pitchFamily="34" charset="-120"/>
               </a:rPr>
-              <a:t>Collection metadata shapes coverage. It is removed before lineage grouping and is not used as a performance feature.</a:t>
+              <a:t>Collection metadata shapes coverage. Predictor features exclude these labels, but source selection and joins remain part of the evidence boundary.</a:t>
             </a:r>
             <a:endParaRPr lang="en-US" sz="1010" dirty="0"/>
           </a:p>
@@ -21929,7 +21703,7 @@
               <a:buNone/>
             </a:pPr>
             <a:r>
-              <a:rPr lang="en-US" sz="900" b="1" spc="110" kern="0" dirty="0">
+              <a:rPr lang="en-US" sz="900" b="1" dirty="0">
                 <a:solidFill>
                   <a:srgbClr val="00693E"/>
                 </a:solidFill>
@@ -21976,7 +21750,7 @@
                 <a:ea typeface="Aptos Display" pitchFamily="34" charset="-122"/>
                 <a:cs typeface="Aptos Display" pitchFamily="34" charset="-120"/>
               </a:rPr>
-              <a:t>Phase 2 is broad; ablation is benchmark-heavy</a:t>
+              <a:t>Selection buckets describe curation; ablation is benchmark-heavy</a:t>
             </a:r>
             <a:endParaRPr lang="en-US" sz="2500" dirty="0"/>
           </a:p>
@@ -22122,8 +21896,8 @@
         </p:blipFill>
         <p:spPr>
           <a:xfrm>
-            <a:off x="472971" y="1069848"/>
-            <a:ext cx="5372563" cy="3493008"/>
+            <a:off x="462569" y="1069848"/>
+            <a:ext cx="5393367" cy="3493008"/>
           </a:xfrm>
           <a:prstGeom prst="rect">
             <a:avLst/>
@@ -22212,7 +21986,7 @@
                 <a:ea typeface="Aptos" pitchFamily="34" charset="-122"/>
                 <a:cs typeface="Aptos" pitchFamily="34" charset="-120"/>
               </a:rPr>
-              <a:t>2,291 benchmark scores · 13,301 lineage records</a:t>
+              <a:t>2,922 average-score records · 13,301 declared source links</a:t>
             </a:r>
             <a:endParaRPr lang="en-US" sz="1010" dirty="0"/>
           </a:p>
@@ -22293,7 +22067,7 @@
                 <a:ea typeface="Aptos" pitchFamily="34" charset="-122"/>
                 <a:cs typeface="Aptos" pitchFamily="34" charset="-120"/>
               </a:rPr>
-              <a:t>4,662 benchmark scores · 291 lineage records</a:t>
+              <a:t>4,662 average-score records · 291 declared source links</a:t>
             </a:r>
             <a:endParaRPr lang="en-US" sz="1010" dirty="0"/>
           </a:p>
@@ -22349,7 +22123,7 @@
                 <a:ea typeface="Aptos" pitchFamily="34" charset="-122"/>
                 <a:cs typeface="Aptos" pitchFamily="34" charset="-120"/>
               </a:rPr>
-              <a:t>Type and architecture labels describe the datasets only. 'Other labelled' combines lower-count architecture families.</a:t>
+              <a:t>Type-chart categories are selection buckets, not verified model types. Source links are declared, not verified ancestry; architecture labels are descriptive.</a:t>
             </a:r>
             <a:endParaRPr lang="en-US" sz="950" dirty="0"/>
           </a:p>
@@ -22493,7 +22267,7 @@
               <a:buNone/>
             </a:pPr>
             <a:r>
-              <a:rPr lang="en-US" sz="900" b="1" spc="110" kern="0" dirty="0">
+              <a:rPr lang="en-US" sz="900" b="1" dirty="0">
                 <a:solidFill>
                   <a:srgbClr val="003B95"/>
                 </a:solidFill>
@@ -23342,7 +23116,7 @@
                 <a:ea typeface="Aptos" pitchFamily="34" charset="-122"/>
                 <a:cs typeface="Aptos" pitchFamily="34" charset="-120"/>
               </a:rPr>
-              <a:t>Source labels explain coverage here. They are removed before clustering, candidate-base matching, and performance prediction.</a:t>
+              <a:t>These are parent role-profile counts. The reassessment also uses all-matrix summaries; source IDs define the collection holdout, not predictor features.</a:t>
             </a:r>
             <a:endParaRPr lang="en-US" sz="1020" dirty="0"/>
           </a:p>
@@ -23486,7 +23260,7 @@
               <a:buNone/>
             </a:pPr>
             <a:r>
-              <a:rPr lang="en-US" sz="900" b="1" spc="110" kern="0" dirty="0">
+              <a:rPr lang="en-US" sz="900" b="1" dirty="0">
                 <a:solidFill>
                   <a:srgbClr val="003B95"/>
                 </a:solidFill>
@@ -24355,7 +24129,7 @@
                 <a:ea typeface="Aptos" pitchFamily="34" charset="-122"/>
                 <a:cs typeface="Aptos" pitchFamily="34" charset="-120"/>
               </a:rPr>
-              <a:t>Stored DKS alpha · depth scaled to [0,1] · 32 positions per observed role · within-role ranks · compare only shared roles</a:t>
+              <a:t>Custom stored DKS alpha, not a WeightWatcher run · depth scaled to [0,1] · 32 positions per observed role · within-role ranks for grouping</a:t>
             </a:r>
             <a:endParaRPr lang="en-US" sz="1100" dirty="0"/>
           </a:p>
@@ -24433,7 +24207,7 @@
                 <a:ea typeface="Aptos" pitchFamily="34" charset="-122"/>
                 <a:cs typeface="Aptos" pitchFamily="34" charset="-120"/>
               </a:rPr>
-              <a:t>Fixed-tail Hill alpha, k=n/2 · role-wise Spearman · z-scored injective order-preserving dynamic programming when depths differ</a:t>
+              <a:t>Fixed-tail Hill alpha, k=n/2 · raw-alpha clustering · role-wise Spearman similarity · order-preserving DP for unequal depths · MoE experts averaged</a:t>
             </a:r>
             <a:endParaRPr lang="en-US" sz="1100" dirty="0"/>
           </a:p>
@@ -24480,7 +24254,7 @@
                 <a:ea typeface="Aptos" pitchFamily="34" charset="-122"/>
                 <a:cs typeface="Aptos" pitchFamily="34" charset="-120"/>
               </a:rPr>
-              <a:t>Same scientific idea; different alpha estimator and unequal-depth calculation. Numerical results are not an exact replication.</a:t>
+              <a:t>Ranks discard alpha offsets, scales, and spacing, but retain order. Absolute alpha and other saved matrix statistics can still carry performance signal.</a:t>
             </a:r>
             <a:endParaRPr lang="en-US" sz="1080" dirty="0"/>
           </a:p>
@@ -24624,7 +24398,7 @@
               <a:buNone/>
             </a:pPr>
             <a:r>
-              <a:rPr lang="en-US" sz="900" b="1" spc="110" kern="0" dirty="0">
+              <a:rPr lang="en-US" sz="900" b="1" dirty="0">
                 <a:solidFill>
                   <a:srgbClr val="003B95"/>
                 </a:solidFill>
@@ -24671,7 +24445,7 @@
                 <a:ea typeface="Aptos Display" pitchFamily="34" charset="-122"/>
                 <a:cs typeface="Aptos Display" pitchFamily="34" charset="-120"/>
               </a:rPr>
-              <a:t>Seven roles define the paper-comparison core, not general eligibility</a:t>
+              <a:t>Role coverage and all-matrix coverage answer different questions</a:t>
             </a:r>
             <a:endParaRPr lang="en-US" sz="2500" dirty="0"/>
           </a:p>
@@ -24756,7 +24530,7 @@
                 <a:ea typeface="Aptos" pitchFamily="34" charset="-122"/>
                 <a:cs typeface="Aptos" pitchFamily="34" charset="-120"/>
               </a:rPr>
-              <a:t>Sources: weight_only_2a5abfeb98dc33d9662c/population_ledger.csv and metadata.json</a:t>
+              <a:t>Sources: parent population_ledger.csv; reassessment_0063666fd5733b453c38/metadata.json and all_matrix_cluster_validation.csv</a:t>
             </a:r>
             <a:endParaRPr lang="en-US" sz="660" dirty="0"/>
           </a:p>
@@ -25014,7 +24788,7 @@
                 <a:ea typeface="Aptos Display" pitchFamily="34" charset="-122"/>
                 <a:cs typeface="Aptos Display" pitchFamily="34" charset="-120"/>
               </a:rPr>
-              <a:t>11,801</a:t>
+              <a:t>12,365</a:t>
             </a:r>
             <a:endParaRPr lang="en-US" sz="2700" dirty="0"/>
           </a:p>
@@ -25053,7 +24827,7 @@
                 <a:ea typeface="Aptos" pitchFamily="34" charset="-122"/>
                 <a:cs typeface="Aptos" pitchFamily="34" charset="-120"/>
               </a:rPr>
-              <a:t>performance profiles</a:t>
+              <a:t>all-matrix alpha eligible</a:t>
             </a:r>
             <a:endParaRPr lang="en-US" sz="1050" dirty="0"/>
           </a:p>
@@ -25068,11 +24842,11 @@
         <p:spPr>
           <a:xfrm>
             <a:off x="8065008" y="4828032"/>
-            <a:ext cx="3154680" cy="685800"/>
+            <a:ext cx="3154680" cy="941832"/>
           </a:xfrm>
           <a:prstGeom prst="roundRect">
             <a:avLst>
-              <a:gd name="adj" fmla="val 6667"/>
+              <a:gd name="adj" fmla="val 4854"/>
             </a:avLst>
           </a:prstGeom>
           <a:solidFill>
@@ -25100,7 +24874,7 @@
                 <a:ea typeface="Aptos" pitchFamily="34" charset="-122"/>
                 <a:cs typeface="Aptos" pitchFamily="34" charset="-120"/>
               </a:rPr>
-              <a:t>Partial lineage patterns must retain the complete-profile nearest model in the top ten at least 90% of the time. Performance accepts the label-free 4-role cutoff and requires every neighbor to share that many roles.</a:t>
+              <a:t>Broader eligibility does not imply better grouping. All-matrix family ARI 0.258 vs rank 0.913 on human-reviewed labels; populations differ.</a:t>
             </a:r>
             <a:endParaRPr lang="en-US" sz="1050" dirty="0"/>
           </a:p>
@@ -25244,7 +25018,7 @@
               <a:buNone/>
             </a:pPr>
             <a:r>
-              <a:rPr lang="en-US" sz="900" b="1" spc="110" kern="0" dirty="0">
+              <a:rPr lang="en-US" sz="900" b="1" dirty="0">
                 <a:solidFill>
                   <a:srgbClr val="00693E"/>
                 </a:solidFill>

--- a/deliverables/htsr_model_zoo_deck/model_zoo_htsr_study.pptx
+++ b/deliverables/htsr_model_zoo_deck/model_zoo_htsr_study.pptx
@@ -26,9 +26,10 @@
     <p:sldId id="274" r:id="rId20"/>
     <p:sldId id="275" r:id="rId21"/>
     <p:sldId id="276" r:id="rId22"/>
+    <p:sldId id="277" r:id="rId23"/>
   </p:sldIdLst>
   <p:notesMasterIdLst>
-    <p:notesMasterId r:id="rId23"/>
+    <p:notesMasterId r:id="rId24"/>
   </p:notesMasterIdLst>
   <p:sldSz cx="12191695" cy="6858000"/>
   <p:notesSz cx="6858000" cy="12191695"/>
@@ -1708,6 +1709,94 @@
 </p:notes>
 </file>
 
+<file path=ppt/notesSlides/notesSlide22.xml><?xml version="1.0" encoding="utf-8"?>
+<p:notes xmlns:a="http://schemas.openxmlformats.org/drawingml/2006/main" xmlns:r="http://schemas.openxmlformats.org/officeDocument/2006/relationships" xmlns:p="http://schemas.openxmlformats.org/presentationml/2006/main">
+  <p:cSld>
+    <p:spTree>
+      <p:nvGrpSpPr>
+        <p:cNvPr id="1" name=""/>
+        <p:cNvGrpSpPr/>
+        <p:nvPr/>
+      </p:nvGrpSpPr>
+      <p:grpSpPr>
+        <a:xfrm>
+          <a:off x="0" y="0"/>
+          <a:ext cx="0" cy="0"/>
+          <a:chOff x="0" y="0"/>
+          <a:chExt cx="0" cy="0"/>
+        </a:xfrm>
+      </p:grpSpPr>
+      <p:sp>
+        <p:nvSpPr>
+          <p:cNvPr id="2" name="Slide Image Placeholder 1"/>
+          <p:cNvSpPr>
+            <a:spLocks noGrp="1" noRot="1" noChangeAspect="1"/>
+          </p:cNvSpPr>
+          <p:nvPr>
+            <p:ph type="sldImg"/>
+          </p:nvPr>
+        </p:nvSpPr>
+        <p:spPr/>
+      </p:sp>
+      <p:sp>
+        <p:nvSpPr>
+          <p:cNvPr id="3" name="Notes Placeholder 2"/>
+          <p:cNvSpPr>
+            <a:spLocks noGrp="1"/>
+          </p:cNvSpPr>
+          <p:nvPr>
+            <p:ph type="body" idx="1"/>
+          </p:nvPr>
+        </p:nvSpPr>
+        <p:spPr/>
+        <p:txBody>
+          <a:bodyPr/>
+          <a:lstStyle/>
+          <a:p>
+            <a:r>
+              <a:rPr lang="en-US" dirty="0"/>
+              <a:t/>
+            </a:r>
+            <a:endParaRPr lang="en-US" dirty="0"/>
+          </a:p>
+        </p:txBody>
+      </p:sp>
+      <p:sp>
+        <p:nvSpPr>
+          <p:cNvPr id="4" name="Slide Number Placeholder 3"/>
+          <p:cNvSpPr>
+            <a:spLocks noGrp="1"/>
+          </p:cNvSpPr>
+          <p:nvPr>
+            <p:ph type="sldNum" sz="quarter" idx="10"/>
+          </p:nvPr>
+        </p:nvSpPr>
+        <p:spPr/>
+        <p:txBody>
+          <a:bodyPr/>
+          <a:lstStyle/>
+          <a:p>
+            <a:fld id="{F7021451-1387-4CA6-816F-3879F97B5CBC}" type="slidenum">
+              <a:rPr lang="en-US"/>
+              <a:t>22</a:t>
+            </a:fld>
+            <a:endParaRPr lang="en-US"/>
+          </a:p>
+        </p:txBody>
+      </p:sp>
+    </p:spTree>
+    <p:extLst>
+      <p:ext uri="{BB962C8B-B14F-4D97-AF65-F5344CB8AC3E}">
+        <p14:creationId xmlns:p14="http://schemas.microsoft.com/office/powerpoint/2010/main" val="1024086991"/>
+      </p:ext>
+    </p:extLst>
+  </p:cSld>
+  <p:clrMapOvr>
+    <a:masterClrMapping/>
+  </p:clrMapOvr>
+</p:notes>
+</file>
+
 <file path=ppt/notesSlides/notesSlide3.xml><?xml version="1.0" encoding="utf-8"?>
 <p:notes xmlns:a="http://schemas.openxmlformats.org/drawingml/2006/main" xmlns:r="http://schemas.openxmlformats.org/officeDocument/2006/relationships" xmlns:p="http://schemas.openxmlformats.org/presentationml/2006/main">
   <p:cSld>
@@ -6388,6 +6477,45 @@
         </p:nvSpPr>
         <p:spPr>
           <a:xfrm>
+            <a:off x="685800" y="5925312"/>
+            <a:ext cx="6766560" cy="219456"/>
+          </a:xfrm>
+          <a:prstGeom prst="rect">
+            <a:avLst/>
+          </a:prstGeom>
+          <a:noFill/>
+          <a:ln/>
+        </p:spPr>
+        <p:txBody>
+          <a:bodyPr wrap="square" lIns="0" tIns="0" rIns="0" bIns="0" rtlCol="0" anchor="t"/>
+          <a:lstStyle/>
+          <a:p>
+            <a:pPr indent="0" marL="0">
+              <a:buNone/>
+            </a:pPr>
+            <a:r>
+              <a:rPr lang="en-US" sz="1000" dirty="0">
+                <a:solidFill>
+                  <a:srgbClr val="D9E2EC"/>
+                </a:solidFill>
+                <a:latin typeface="Aptos" pitchFamily="34" charset="0"/>
+                <a:ea typeface="Aptos" pitchFamily="34" charset="-122"/>
+                <a:cs typeface="Aptos" pitchFamily="34" charset="-120"/>
+              </a:rPr>
+              <a:t>September 2026 results / October 2026 scale-up plan</a:t>
+            </a:r>
+            <a:endParaRPr lang="en-US" sz="1000" dirty="0"/>
+          </a:p>
+        </p:txBody>
+      </p:sp>
+      <p:sp>
+        <p:nvSpPr>
+          <p:cNvPr id="134" name="Text 132"/>
+          <p:cNvSpPr/>
+          <p:nvPr/>
+        </p:nvSpPr>
+        <p:spPr>
+          <a:xfrm>
             <a:off x="685800" y="6336792"/>
             <a:ext cx="6766560" cy="164592"/>
           </a:xfrm>
@@ -12716,7 +12844,7 @@
                 <a:ea typeface="Aptos" pitchFamily="34" charset="-122"/>
                 <a:cs typeface="Aptos" pitchFamily="34" charset="-120"/>
               </a:rPr>
-              <a:t>Exploratory evidence, not an untouched replication. Before deployment: verify checkpoint revisions, test external roots, and calibrate rejection on separate data.</a:t>
+              <a:t>Next experiment: use the newer pinned collection to test whether weight measurements improve task-specific model choices. See the October scale-up plan in the appendix.</a:t>
             </a:r>
             <a:endParaRPr lang="en-US" sz="1120" dirty="0"/>
           </a:p>
@@ -12907,7 +13035,7 @@
                 <a:ea typeface="Aptos Display" pitchFamily="34" charset="-122"/>
                 <a:cs typeface="Aptos Display" pitchFamily="34" charset="-120"/>
               </a:rPr>
-              <a:t>Methods and definitions</a:t>
+              <a:t>Methods and next study</a:t>
             </a:r>
             <a:endParaRPr lang="en-US" sz="3800" dirty="0"/>
           </a:p>
@@ -13359,6 +13487,107 @@
       <p:sp>
         <p:nvSpPr>
           <p:cNvPr id="20" name="Text 18"/>
+          <p:cNvSpPr/>
+          <p:nvPr/>
+        </p:nvSpPr>
+        <p:spPr>
+          <a:xfrm>
+            <a:off x="713232" y="5696712"/>
+            <a:ext cx="502920" cy="274320"/>
+          </a:xfrm>
+          <a:prstGeom prst="rect">
+            <a:avLst/>
+          </a:prstGeom>
+          <a:noFill/>
+          <a:ln/>
+        </p:spPr>
+        <p:txBody>
+          <a:bodyPr wrap="square" lIns="0" tIns="0" rIns="0" bIns="0" rtlCol="0" anchor="ctr"/>
+          <a:lstStyle/>
+          <a:p>
+            <a:pPr indent="0" marL="0">
+              <a:buNone/>
+            </a:pPr>
+            <a:r>
+              <a:rPr lang="en-US" sz="1050" b="1" dirty="0">
+                <a:solidFill>
+                  <a:srgbClr val="FDB515"/>
+                </a:solidFill>
+                <a:latin typeface="Aptos" pitchFamily="34" charset="0"/>
+                <a:ea typeface="Aptos" pitchFamily="34" charset="-122"/>
+                <a:cs typeface="Aptos" pitchFamily="34" charset="-120"/>
+              </a:rPr>
+              <a:t>A5</a:t>
+            </a:r>
+            <a:endParaRPr lang="en-US" sz="1050" dirty="0"/>
+          </a:p>
+        </p:txBody>
+      </p:sp>
+      <p:sp>
+        <p:nvSpPr>
+          <p:cNvPr id="21" name="Shape 19"/>
+          <p:cNvSpPr/>
+          <p:nvPr/>
+        </p:nvSpPr>
+        <p:spPr>
+          <a:xfrm>
+            <a:off x="1353312" y="5833872"/>
+            <a:ext cx="603504" cy="0"/>
+          </a:xfrm>
+          <a:prstGeom prst="line">
+            <a:avLst/>
+          </a:prstGeom>
+          <a:noFill/>
+          <a:ln w="22860">
+            <a:solidFill>
+              <a:srgbClr val="FDB515"/>
+            </a:solidFill>
+            <a:prstDash val="solid"/>
+          </a:ln>
+        </p:spPr>
+      </p:sp>
+      <p:sp>
+        <p:nvSpPr>
+          <p:cNvPr id="22" name="Text 20"/>
+          <p:cNvSpPr/>
+          <p:nvPr/>
+        </p:nvSpPr>
+        <p:spPr>
+          <a:xfrm>
+            <a:off x="2139696" y="5687568"/>
+            <a:ext cx="3840480" cy="310896"/>
+          </a:xfrm>
+          <a:prstGeom prst="rect">
+            <a:avLst/>
+          </a:prstGeom>
+          <a:noFill/>
+          <a:ln/>
+        </p:spPr>
+        <p:txBody>
+          <a:bodyPr wrap="square" lIns="0" tIns="0" rIns="0" bIns="0" rtlCol="0" anchor="ctr"/>
+          <a:lstStyle/>
+          <a:p>
+            <a:pPr indent="0" marL="0">
+              <a:buNone/>
+            </a:pPr>
+            <a:r>
+              <a:rPr lang="en-US" sz="1400" b="1" dirty="0">
+                <a:solidFill>
+                  <a:srgbClr val="FFFFFF"/>
+                </a:solidFill>
+                <a:latin typeface="Aptos" pitchFamily="34" charset="0"/>
+                <a:ea typeface="Aptos" pitchFamily="34" charset="-122"/>
+                <a:cs typeface="Aptos" pitchFamily="34" charset="-120"/>
+              </a:rPr>
+              <a:t>October scale-up research plan</a:t>
+            </a:r>
+            <a:endParaRPr lang="en-US" sz="1400" dirty="0"/>
+          </a:p>
+        </p:txBody>
+      </p:sp>
+      <p:sp>
+        <p:nvSpPr>
+          <p:cNvPr id="23" name="Text 21"/>
           <p:cNvSpPr/>
           <p:nvPr/>
         </p:nvSpPr>
@@ -13665,7 +13894,7 @@
                 <a:ea typeface="Aptos" pitchFamily="34" charset="-122"/>
                 <a:cs typeface="Aptos" pitchFamily="34" charset="-120"/>
               </a:rPr>
-              <a:t>Sources: Model-Zoo/esd_experiment/gputracker and Model-Zoo/docs/operations/analysis.md</a:t>
+              <a:t>Historical collection workflow; newer operational collector: /jumbo/yaoqingyang/kinshuk/Model-Zoo/docs/operations/analysis.md</a:t>
             </a:r>
             <a:endParaRPr lang="en-US" sz="660" dirty="0"/>
           </a:p>
@@ -15203,7 +15432,7 @@
                 <a:ea typeface="Aptos" pitchFamily="34" charset="-122"/>
                 <a:cs typeface="Aptos" pitchFamily="34" charset="-120"/>
               </a:rPr>
-              <a:t>Sources: Model-Zoo/esd_experiment/src/worker.py and Model-Zoo/README.md</a:t>
+              <a:t>Sources: historical model statistics; current collector: /jumbo/yaoqingyang/kinshuk/Model-Zoo/docs/operations/analysis.md</a:t>
             </a:r>
             <a:endParaRPr lang="en-US" sz="660" dirty="0"/>
           </a:p>
@@ -16085,7 +16314,7 @@
                 <a:ea typeface="Aptos" pitchFamily="34" charset="-122"/>
                 <a:cs typeface="Aptos" pitchFamily="34" charset="-120"/>
               </a:rPr>
-              <a:t>Optional eigenvalues</a:t>
+              <a:t>Full spectra</a:t>
             </a:r>
             <a:endParaRPr lang="en-US" sz="930" dirty="0"/>
           </a:p>
@@ -16102,7 +16331,7 @@
                 <a:ea typeface="Aptos" pitchFamily="34" charset="-122"/>
                 <a:cs typeface="Aptos" pitchFamily="34" charset="-120"/>
               </a:rPr>
-              <a:t>larger files; useful for later re-fitting</a:t>
+              <a:t>current collector: saved by default; opt-out available</a:t>
             </a:r>
             <a:endParaRPr lang="en-US" sz="930" dirty="0"/>
           </a:p>
@@ -16260,7 +16489,7 @@
                 <a:ea typeface="Aptos" pitchFamily="34" charset="-122"/>
                 <a:cs typeface="Aptos" pitchFamily="34" charset="-120"/>
               </a:rPr>
-              <a:t>Analysis continues past inaccessible or repeatedly failing models after the configured retry limit. Completed records remain available for aggregation.</a:t>
+              <a:t>New collector: pinned revisions and matrix coverage. Historical results here still use stored DKS alpha; the new default uses the fixed-tail rule.</a:t>
             </a:r>
             <a:endParaRPr lang="en-US" sz="1030" dirty="0"/>
           </a:p>
@@ -19446,6 +19675,1406 @@
 </p:sld>
 </file>
 
+<file path=ppt/slides/slide22.xml><?xml version="1.0" encoding="utf-8"?>
+<p:sld xmlns:a="http://schemas.openxmlformats.org/drawingml/2006/main" xmlns:r="http://schemas.openxmlformats.org/officeDocument/2006/relationships" xmlns:p="http://schemas.openxmlformats.org/presentationml/2006/main">
+  <p:cSld name="Slide 22">
+    <p:bg>
+      <p:bgPr>
+        <a:solidFill>
+          <a:srgbClr val="FFFFFF"/>
+        </a:solidFill>
+      </p:bgPr>
+    </p:bg>
+    <p:spTree>
+      <p:nvGrpSpPr>
+        <p:cNvPr id="1" name=""/>
+        <p:cNvGrpSpPr/>
+        <p:nvPr/>
+      </p:nvGrpSpPr>
+      <p:grpSpPr>
+        <a:xfrm>
+          <a:off x="0" y="0"/>
+          <a:ext cx="0" cy="0"/>
+          <a:chOff x="0" y="0"/>
+          <a:chExt cx="0" cy="0"/>
+        </a:xfrm>
+      </p:grpSpPr>
+      <p:sp>
+        <p:nvSpPr>
+          <p:cNvPr id="2" name="Shape 0"/>
+          <p:cNvSpPr/>
+          <p:nvPr/>
+        </p:nvSpPr>
+        <p:spPr>
+          <a:xfrm>
+            <a:off x="0" y="0"/>
+            <a:ext cx="5715000" cy="50292"/>
+          </a:xfrm>
+          <a:prstGeom prst="rect">
+            <a:avLst/>
+          </a:prstGeom>
+          <a:solidFill>
+            <a:srgbClr val="002676"/>
+          </a:solidFill>
+          <a:ln w="12700">
+            <a:solidFill>
+              <a:srgbClr val="333333">
+                <a:alpha val="0"/>
+              </a:srgbClr>
+            </a:solidFill>
+            <a:prstDash val="solid"/>
+          </a:ln>
+        </p:spPr>
+      </p:sp>
+      <p:sp>
+        <p:nvSpPr>
+          <p:cNvPr id="3" name="Shape 1"/>
+          <p:cNvSpPr/>
+          <p:nvPr/>
+        </p:nvSpPr>
+        <p:spPr>
+          <a:xfrm>
+            <a:off x="5715000" y="0"/>
+            <a:ext cx="3337560" cy="50292"/>
+          </a:xfrm>
+          <a:prstGeom prst="rect">
+            <a:avLst/>
+          </a:prstGeom>
+          <a:solidFill>
+            <a:srgbClr val="00693E"/>
+          </a:solidFill>
+          <a:ln w="12700">
+            <a:solidFill>
+              <a:srgbClr val="333333">
+                <a:alpha val="0"/>
+              </a:srgbClr>
+            </a:solidFill>
+            <a:prstDash val="solid"/>
+          </a:ln>
+        </p:spPr>
+      </p:sp>
+      <p:sp>
+        <p:nvSpPr>
+          <p:cNvPr id="4" name="Shape 2"/>
+          <p:cNvSpPr/>
+          <p:nvPr/>
+        </p:nvSpPr>
+        <p:spPr>
+          <a:xfrm>
+            <a:off x="9052560" y="0"/>
+            <a:ext cx="3139135" cy="50292"/>
+          </a:xfrm>
+          <a:prstGeom prst="rect">
+            <a:avLst/>
+          </a:prstGeom>
+          <a:solidFill>
+            <a:srgbClr val="FDB515"/>
+          </a:solidFill>
+          <a:ln w="12700">
+            <a:solidFill>
+              <a:srgbClr val="333333">
+                <a:alpha val="0"/>
+              </a:srgbClr>
+            </a:solidFill>
+            <a:prstDash val="solid"/>
+          </a:ln>
+        </p:spPr>
+      </p:sp>
+      <p:sp>
+        <p:nvSpPr>
+          <p:cNvPr id="5" name="Text 3"/>
+          <p:cNvSpPr/>
+          <p:nvPr/>
+        </p:nvSpPr>
+        <p:spPr>
+          <a:xfrm>
+            <a:off x="530352" y="201168"/>
+            <a:ext cx="4937760" cy="201168"/>
+          </a:xfrm>
+          <a:prstGeom prst="rect">
+            <a:avLst/>
+          </a:prstGeom>
+          <a:noFill/>
+          <a:ln/>
+        </p:spPr>
+        <p:txBody>
+          <a:bodyPr wrap="square" lIns="0" tIns="0" rIns="0" bIns="0" rtlCol="0" anchor="t"/>
+          <a:lstStyle/>
+          <a:p>
+            <a:pPr indent="0" marL="0">
+              <a:buNone/>
+            </a:pPr>
+            <a:r>
+              <a:rPr lang="en-US" sz="900" b="1" dirty="0">
+                <a:solidFill>
+                  <a:srgbClr val="00693E"/>
+                </a:solidFill>
+                <a:latin typeface="Aptos" pitchFamily="34" charset="0"/>
+                <a:ea typeface="Aptos" pitchFamily="34" charset="-122"/>
+                <a:cs typeface="Aptos" pitchFamily="34" charset="-120"/>
+              </a:rPr>
+              <a:t>APPENDIX A5 · OCTOBER RESEARCH PLAN</a:t>
+            </a:r>
+            <a:endParaRPr lang="en-US" sz="900" dirty="0"/>
+          </a:p>
+        </p:txBody>
+      </p:sp>
+      <p:sp>
+        <p:nvSpPr>
+          <p:cNvPr id="6" name="Text 4"/>
+          <p:cNvSpPr/>
+          <p:nvPr/>
+        </p:nvSpPr>
+        <p:spPr>
+          <a:xfrm>
+            <a:off x="530352" y="448056"/>
+            <a:ext cx="11109960" cy="420624"/>
+          </a:xfrm>
+          <a:prstGeom prst="rect">
+            <a:avLst/>
+          </a:prstGeom>
+          <a:noFill/>
+          <a:ln/>
+        </p:spPr>
+        <p:txBody>
+          <a:bodyPr wrap="square" lIns="0" tIns="0" rIns="0" bIns="0" rtlCol="0" anchor="ctr"/>
+          <a:lstStyle/>
+          <a:p>
+            <a:pPr indent="0" marL="0">
+              <a:buNone/>
+            </a:pPr>
+            <a:r>
+              <a:rPr lang="en-US" sz="2500" b="1" dirty="0">
+                <a:solidFill>
+                  <a:srgbClr val="14213D"/>
+                </a:solidFill>
+                <a:latin typeface="Aptos Display" pitchFamily="34" charset="0"/>
+                <a:ea typeface="Aptos Display" pitchFamily="34" charset="-122"/>
+                <a:cs typeface="Aptos Display" pitchFamily="34" charset="-120"/>
+              </a:rPr>
+              <a:t>Do weight measurements improve model selection for a task?</a:t>
+            </a:r>
+            <a:endParaRPr lang="en-US" sz="2500" dirty="0"/>
+          </a:p>
+        </p:txBody>
+      </p:sp>
+      <p:sp>
+        <p:nvSpPr>
+          <p:cNvPr id="7" name="Shape 5"/>
+          <p:cNvSpPr/>
+          <p:nvPr/>
+        </p:nvSpPr>
+        <p:spPr>
+          <a:xfrm>
+            <a:off x="530352" y="969264"/>
+            <a:ext cx="11109960" cy="0"/>
+          </a:xfrm>
+          <a:prstGeom prst="line">
+            <a:avLst/>
+          </a:prstGeom>
+          <a:noFill/>
+          <a:ln w="10160">
+            <a:solidFill>
+              <a:srgbClr val="D9E2EC"/>
+            </a:solidFill>
+            <a:prstDash val="solid"/>
+          </a:ln>
+        </p:spPr>
+      </p:sp>
+      <p:sp>
+        <p:nvSpPr>
+          <p:cNvPr id="8" name="Shape 6"/>
+          <p:cNvSpPr/>
+          <p:nvPr/>
+        </p:nvSpPr>
+        <p:spPr>
+          <a:xfrm>
+            <a:off x="530352" y="6556248"/>
+            <a:ext cx="11109960" cy="0"/>
+          </a:xfrm>
+          <a:prstGeom prst="line">
+            <a:avLst/>
+          </a:prstGeom>
+          <a:noFill/>
+          <a:ln w="8890">
+            <a:solidFill>
+              <a:srgbClr val="D9E2EC"/>
+            </a:solidFill>
+            <a:prstDash val="solid"/>
+          </a:ln>
+        </p:spPr>
+      </p:sp>
+      <p:sp>
+        <p:nvSpPr>
+          <p:cNvPr id="9" name="Text 7"/>
+          <p:cNvSpPr/>
+          <p:nvPr/>
+        </p:nvSpPr>
+        <p:spPr>
+          <a:xfrm>
+            <a:off x="530352" y="6620256"/>
+            <a:ext cx="9966960" cy="118872"/>
+          </a:xfrm>
+          <a:prstGeom prst="rect">
+            <a:avLst/>
+          </a:prstGeom>
+          <a:noFill/>
+          <a:ln/>
+        </p:spPr>
+        <p:txBody>
+          <a:bodyPr wrap="square" lIns="0" tIns="0" rIns="0" bIns="0" rtlCol="0" anchor="ctr"/>
+          <a:lstStyle/>
+          <a:p>
+            <a:pPr indent="0" marL="0">
+              <a:buNone/>
+            </a:pPr>
+            <a:r>
+              <a:rPr lang="en-US" sz="660" dirty="0">
+                <a:solidFill>
+                  <a:srgbClr val="667085"/>
+                </a:solidFill>
+                <a:latin typeface="Aptos" pitchFamily="34" charset="0"/>
+                <a:ea typeface="Aptos" pitchFamily="34" charset="-122"/>
+                <a:cs typeface="Aptos" pitchFamily="34" charset="-120"/>
+              </a:rPr>
+              <a:t>Source: docs/research/scaleup/model_zoo_frontier_research_plan_2026-10-23.md; proposed experiments and milestones.</a:t>
+            </a:r>
+            <a:endParaRPr lang="en-US" sz="660" dirty="0"/>
+          </a:p>
+        </p:txBody>
+      </p:sp>
+      <p:sp>
+        <p:nvSpPr>
+          <p:cNvPr id="10" name="Text 8"/>
+          <p:cNvSpPr/>
+          <p:nvPr/>
+        </p:nvSpPr>
+        <p:spPr>
+          <a:xfrm>
+            <a:off x="11045952" y="6601968"/>
+            <a:ext cx="585216" cy="137160"/>
+          </a:xfrm>
+          <a:prstGeom prst="rect">
+            <a:avLst/>
+          </a:prstGeom>
+          <a:noFill/>
+          <a:ln/>
+        </p:spPr>
+        <p:txBody>
+          <a:bodyPr wrap="square" lIns="0" tIns="0" rIns="0" bIns="0" rtlCol="0" anchor="ctr"/>
+          <a:lstStyle/>
+          <a:p>
+            <a:pPr algn="r" indent="0" marL="0">
+              <a:buNone/>
+            </a:pPr>
+            <a:r>
+              <a:rPr lang="en-US" sz="800" b="1" dirty="0">
+                <a:solidFill>
+                  <a:srgbClr val="00693E"/>
+                </a:solidFill>
+                <a:latin typeface="Aptos" pitchFamily="34" charset="0"/>
+                <a:ea typeface="Aptos" pitchFamily="34" charset="-122"/>
+                <a:cs typeface="Aptos" pitchFamily="34" charset="-120"/>
+              </a:rPr>
+              <a:t>22</a:t>
+            </a:r>
+            <a:endParaRPr lang="en-US" sz="800" dirty="0"/>
+          </a:p>
+        </p:txBody>
+      </p:sp>
+      <p:sp>
+        <p:nvSpPr>
+          <p:cNvPr id="11" name="Text 9"/>
+          <p:cNvSpPr/>
+          <p:nvPr/>
+        </p:nvSpPr>
+        <p:spPr>
+          <a:xfrm>
+            <a:off x="621792" y="1143000"/>
+            <a:ext cx="10954512" cy="292608"/>
+          </a:xfrm>
+          <a:prstGeom prst="rect">
+            <a:avLst/>
+          </a:prstGeom>
+          <a:noFill/>
+          <a:ln/>
+        </p:spPr>
+        <p:txBody>
+          <a:bodyPr wrap="square" lIns="0" tIns="0" rIns="0" bIns="0" rtlCol="0" anchor="t"/>
+          <a:lstStyle/>
+          <a:p>
+            <a:pPr indent="0" marL="0">
+              <a:buNone/>
+            </a:pPr>
+            <a:r>
+              <a:rPr lang="en-US" sz="1200" dirty="0">
+                <a:solidFill>
+                  <a:srgbClr val="344054"/>
+                </a:solidFill>
+                <a:latin typeface="Aptos" pitchFamily="34" charset="0"/>
+                <a:ea typeface="Aptos" pitchFamily="34" charset="-122"/>
+                <a:cs typeface="Aptos" pitchFamily="34" charset="-120"/>
+              </a:rPr>
+              <a:t>Measure score lost versus the best feasible model, evaluation cost, and constraint failures.</a:t>
+            </a:r>
+            <a:endParaRPr lang="en-US" sz="1200" dirty="0"/>
+          </a:p>
+        </p:txBody>
+      </p:sp>
+      <p:sp>
+        <p:nvSpPr>
+          <p:cNvPr id="12" name="Text 10"/>
+          <p:cNvSpPr/>
+          <p:nvPr/>
+        </p:nvSpPr>
+        <p:spPr>
+          <a:xfrm>
+            <a:off x="621792" y="1773936"/>
+            <a:ext cx="2240280" cy="603504"/>
+          </a:xfrm>
+          <a:prstGeom prst="roundRect">
+            <a:avLst>
+              <a:gd name="adj" fmla="val 7576"/>
+            </a:avLst>
+          </a:prstGeom>
+          <a:solidFill>
+            <a:srgbClr val="EAF2FF"/>
+          </a:solidFill>
+          <a:ln w="10160">
+            <a:solidFill>
+              <a:srgbClr val="003B95"/>
+            </a:solidFill>
+          </a:ln>
+        </p:spPr>
+        <p:txBody>
+          <a:bodyPr wrap="square" lIns="1778" tIns="1778" rIns="1778" bIns="1778" rtlCol="0" anchor="ctr"/>
+          <a:lstStyle/>
+          <a:p>
+            <a:pPr algn="ctr" indent="0" marL="0">
+              <a:buNone/>
+            </a:pPr>
+            <a:r>
+              <a:rPr lang="en-US" sz="1250" b="1" dirty="0">
+                <a:solidFill>
+                  <a:srgbClr val="14213D"/>
+                </a:solidFill>
+                <a:latin typeface="Aptos" pitchFamily="34" charset="0"/>
+                <a:ea typeface="Aptos" pitchFamily="34" charset="-122"/>
+                <a:cs typeface="Aptos" pitchFamily="34" charset="-120"/>
+              </a:rPr>
+              <a:t>Task + constraints</a:t>
+            </a:r>
+            <a:endParaRPr lang="en-US" sz="1250" dirty="0"/>
+          </a:p>
+        </p:txBody>
+      </p:sp>
+      <p:sp>
+        <p:nvSpPr>
+          <p:cNvPr id="13" name="Text 11"/>
+          <p:cNvSpPr/>
+          <p:nvPr/>
+        </p:nvSpPr>
+        <p:spPr>
+          <a:xfrm>
+            <a:off x="621792" y="2532888"/>
+            <a:ext cx="2240280" cy="420624"/>
+          </a:xfrm>
+          <a:prstGeom prst="rect">
+            <a:avLst/>
+          </a:prstGeom>
+          <a:noFill/>
+          <a:ln/>
+        </p:spPr>
+        <p:txBody>
+          <a:bodyPr wrap="square" lIns="0" tIns="0" rIns="0" bIns="0" rtlCol="0" anchor="t"/>
+          <a:lstStyle/>
+          <a:p>
+            <a:pPr algn="ctr" indent="0" marL="0">
+              <a:buNone/>
+            </a:pPr>
+            <a:r>
+              <a:rPr lang="en-US" sz="1050" dirty="0">
+                <a:solidFill>
+                  <a:srgbClr val="344054"/>
+                </a:solidFill>
+                <a:latin typeface="Aptos" pitchFamily="34" charset="0"/>
+                <a:ea typeface="Aptos" pitchFamily="34" charset="-122"/>
+                <a:cs typeface="Aptos" pitchFamily="34" charset="-120"/>
+              </a:rPr>
+              <a:t>examples, memory, latency</a:t>
+            </a:r>
+            <a:endParaRPr lang="en-US" sz="1050" dirty="0"/>
+          </a:p>
+        </p:txBody>
+      </p:sp>
+      <p:sp>
+        <p:nvSpPr>
+          <p:cNvPr id="14" name="Shape 12"/>
+          <p:cNvSpPr/>
+          <p:nvPr/>
+        </p:nvSpPr>
+        <p:spPr>
+          <a:xfrm>
+            <a:off x="2980944" y="2075688"/>
+            <a:ext cx="393192" cy="0"/>
+          </a:xfrm>
+          <a:prstGeom prst="line">
+            <a:avLst/>
+          </a:prstGeom>
+          <a:noFill/>
+          <a:ln w="19050">
+            <a:solidFill>
+              <a:srgbClr val="003B95"/>
+            </a:solidFill>
+            <a:prstDash val="solid"/>
+            <a:tailEnd type="triangle"/>
+          </a:ln>
+        </p:spPr>
+      </p:sp>
+      <p:sp>
+        <p:nvSpPr>
+          <p:cNvPr id="15" name="Text 13"/>
+          <p:cNvSpPr/>
+          <p:nvPr/>
+        </p:nvSpPr>
+        <p:spPr>
+          <a:xfrm>
+            <a:off x="3511296" y="1773936"/>
+            <a:ext cx="2240280" cy="603504"/>
+          </a:xfrm>
+          <a:prstGeom prst="roundRect">
+            <a:avLst>
+              <a:gd name="adj" fmla="val 7576"/>
+            </a:avLst>
+          </a:prstGeom>
+          <a:solidFill>
+            <a:srgbClr val="E4F3EA"/>
+          </a:solidFill>
+          <a:ln w="10160">
+            <a:solidFill>
+              <a:srgbClr val="00693E"/>
+            </a:solidFill>
+          </a:ln>
+        </p:spPr>
+        <p:txBody>
+          <a:bodyPr wrap="square" lIns="1778" tIns="1778" rIns="1778" bIns="1778" rtlCol="0" anchor="ctr"/>
+          <a:lstStyle/>
+          <a:p>
+            <a:pPr algn="ctr" indent="0" marL="0">
+              <a:buNone/>
+            </a:pPr>
+            <a:r>
+              <a:rPr lang="en-US" sz="1250" b="1" dirty="0">
+                <a:solidFill>
+                  <a:srgbClr val="14213D"/>
+                </a:solidFill>
+                <a:latin typeface="Aptos" pitchFamily="34" charset="0"/>
+                <a:ea typeface="Aptos" pitchFamily="34" charset="-122"/>
+                <a:cs typeface="Aptos" pitchFamily="34" charset="-120"/>
+              </a:rPr>
+              <a:t>Retrieve candidates</a:t>
+            </a:r>
+            <a:endParaRPr lang="en-US" sz="1250" dirty="0"/>
+          </a:p>
+        </p:txBody>
+      </p:sp>
+      <p:sp>
+        <p:nvSpPr>
+          <p:cNvPr id="16" name="Text 14"/>
+          <p:cNvSpPr/>
+          <p:nvPr/>
+        </p:nvSpPr>
+        <p:spPr>
+          <a:xfrm>
+            <a:off x="3511296" y="2532888"/>
+            <a:ext cx="2240280" cy="420624"/>
+          </a:xfrm>
+          <a:prstGeom prst="rect">
+            <a:avLst/>
+          </a:prstGeom>
+          <a:noFill/>
+          <a:ln/>
+        </p:spPr>
+        <p:txBody>
+          <a:bodyPr wrap="square" lIns="0" tIns="0" rIns="0" bIns="0" rtlCol="0" anchor="t"/>
+          <a:lstStyle/>
+          <a:p>
+            <a:pPr algn="ctr" indent="0" marL="0">
+              <a:buNone/>
+            </a:pPr>
+            <a:r>
+              <a:rPr lang="en-US" sz="1050" dirty="0">
+                <a:solidFill>
+                  <a:srgbClr val="344054"/>
+                </a:solidFill>
+                <a:latin typeface="Aptos" pitchFamily="34" charset="0"/>
+                <a:ea typeface="Aptos" pitchFamily="34" charset="-122"/>
+                <a:cs typeface="Aptos" pitchFamily="34" charset="-120"/>
+              </a:rPr>
+              <a:t>use model groups and evidence</a:t>
+            </a:r>
+            <a:endParaRPr lang="en-US" sz="1050" dirty="0"/>
+          </a:p>
+        </p:txBody>
+      </p:sp>
+      <p:sp>
+        <p:nvSpPr>
+          <p:cNvPr id="17" name="Shape 15"/>
+          <p:cNvSpPr/>
+          <p:nvPr/>
+        </p:nvSpPr>
+        <p:spPr>
+          <a:xfrm>
+            <a:off x="5870448" y="2075688"/>
+            <a:ext cx="393192" cy="0"/>
+          </a:xfrm>
+          <a:prstGeom prst="line">
+            <a:avLst/>
+          </a:prstGeom>
+          <a:noFill/>
+          <a:ln w="19050">
+            <a:solidFill>
+              <a:srgbClr val="00693E"/>
+            </a:solidFill>
+            <a:prstDash val="solid"/>
+            <a:tailEnd type="triangle"/>
+          </a:ln>
+        </p:spPr>
+      </p:sp>
+      <p:sp>
+        <p:nvSpPr>
+          <p:cNvPr id="18" name="Text 16"/>
+          <p:cNvSpPr/>
+          <p:nvPr/>
+        </p:nvSpPr>
+        <p:spPr>
+          <a:xfrm>
+            <a:off x="6400800" y="1773936"/>
+            <a:ext cx="2240280" cy="603504"/>
+          </a:xfrm>
+          <a:prstGeom prst="roundRect">
+            <a:avLst>
+              <a:gd name="adj" fmla="val 7576"/>
+            </a:avLst>
+          </a:prstGeom>
+          <a:solidFill>
+            <a:srgbClr val="EAF2FF"/>
+          </a:solidFill>
+          <a:ln w="10160">
+            <a:solidFill>
+              <a:srgbClr val="003B95"/>
+            </a:solidFill>
+          </a:ln>
+        </p:spPr>
+        <p:txBody>
+          <a:bodyPr wrap="square" lIns="1778" tIns="1778" rIns="1778" bIns="1778" rtlCol="0" anchor="ctr"/>
+          <a:lstStyle/>
+          <a:p>
+            <a:pPr algn="ctr" indent="0" marL="0">
+              <a:buNone/>
+            </a:pPr>
+            <a:r>
+              <a:rPr lang="en-US" sz="1250" b="1" dirty="0">
+                <a:solidFill>
+                  <a:srgbClr val="14213D"/>
+                </a:solidFill>
+                <a:latin typeface="Aptos" pitchFamily="34" charset="0"/>
+                <a:ea typeface="Aptos" pitchFamily="34" charset="-122"/>
+                <a:cs typeface="Aptos" pitchFamily="34" charset="-120"/>
+              </a:rPr>
+              <a:t>Estimate suitability</a:t>
+            </a:r>
+            <a:endParaRPr lang="en-US" sz="1250" dirty="0"/>
+          </a:p>
+        </p:txBody>
+      </p:sp>
+      <p:sp>
+        <p:nvSpPr>
+          <p:cNvPr id="19" name="Text 17"/>
+          <p:cNvSpPr/>
+          <p:nvPr/>
+        </p:nvSpPr>
+        <p:spPr>
+          <a:xfrm>
+            <a:off x="6400800" y="2532888"/>
+            <a:ext cx="2240280" cy="420624"/>
+          </a:xfrm>
+          <a:prstGeom prst="rect">
+            <a:avLst/>
+          </a:prstGeom>
+          <a:noFill/>
+          <a:ln/>
+        </p:spPr>
+        <p:txBody>
+          <a:bodyPr wrap="square" lIns="0" tIns="0" rIns="0" bIns="0" rtlCol="0" anchor="t"/>
+          <a:lstStyle/>
+          <a:p>
+            <a:pPr algn="ctr" indent="0" marL="0">
+              <a:buNone/>
+            </a:pPr>
+            <a:r>
+              <a:rPr lang="en-US" sz="1050" dirty="0">
+                <a:solidFill>
+                  <a:srgbClr val="344054"/>
+                </a:solidFill>
+                <a:latin typeface="Aptos" pitchFamily="34" charset="0"/>
+                <a:ea typeface="Aptos" pitchFamily="34" charset="-122"/>
+                <a:cs typeface="Aptos" pitchFamily="34" charset="-120"/>
+              </a:rPr>
+              <a:t>predict scores for the task</a:t>
+            </a:r>
+            <a:endParaRPr lang="en-US" sz="1050" dirty="0"/>
+          </a:p>
+        </p:txBody>
+      </p:sp>
+      <p:sp>
+        <p:nvSpPr>
+          <p:cNvPr id="20" name="Shape 18"/>
+          <p:cNvSpPr/>
+          <p:nvPr/>
+        </p:nvSpPr>
+        <p:spPr>
+          <a:xfrm>
+            <a:off x="8759952" y="2075688"/>
+            <a:ext cx="393192" cy="0"/>
+          </a:xfrm>
+          <a:prstGeom prst="line">
+            <a:avLst/>
+          </a:prstGeom>
+          <a:noFill/>
+          <a:ln w="19050">
+            <a:solidFill>
+              <a:srgbClr val="003B95"/>
+            </a:solidFill>
+            <a:prstDash val="solid"/>
+            <a:tailEnd type="triangle"/>
+          </a:ln>
+        </p:spPr>
+      </p:sp>
+      <p:sp>
+        <p:nvSpPr>
+          <p:cNvPr id="21" name="Text 19"/>
+          <p:cNvSpPr/>
+          <p:nvPr/>
+        </p:nvSpPr>
+        <p:spPr>
+          <a:xfrm>
+            <a:off x="9290304" y="1773936"/>
+            <a:ext cx="2240280" cy="603504"/>
+          </a:xfrm>
+          <a:prstGeom prst="roundRect">
+            <a:avLst>
+              <a:gd name="adj" fmla="val 7576"/>
+            </a:avLst>
+          </a:prstGeom>
+          <a:solidFill>
+            <a:srgbClr val="FFF4C7"/>
+          </a:solidFill>
+          <a:ln w="10160">
+            <a:solidFill>
+              <a:srgbClr val="9A6A00"/>
+            </a:solidFill>
+          </a:ln>
+        </p:spPr>
+        <p:txBody>
+          <a:bodyPr wrap="square" lIns="1778" tIns="1778" rIns="1778" bIns="1778" rtlCol="0" anchor="ctr"/>
+          <a:lstStyle/>
+          <a:p>
+            <a:pPr algn="ctr" indent="0" marL="0">
+              <a:buNone/>
+            </a:pPr>
+            <a:r>
+              <a:rPr lang="en-US" sz="1250" b="1" dirty="0">
+                <a:solidFill>
+                  <a:srgbClr val="14213D"/>
+                </a:solidFill>
+                <a:latin typeface="Aptos" pitchFamily="34" charset="0"/>
+                <a:ea typeface="Aptos" pitchFamily="34" charset="-122"/>
+                <a:cs typeface="Aptos" pitchFamily="34" charset="-120"/>
+              </a:rPr>
+              <a:t>Evaluate finalists</a:t>
+            </a:r>
+            <a:endParaRPr lang="en-US" sz="1250" dirty="0"/>
+          </a:p>
+        </p:txBody>
+      </p:sp>
+      <p:sp>
+        <p:nvSpPr>
+          <p:cNvPr id="22" name="Text 20"/>
+          <p:cNvSpPr/>
+          <p:nvPr/>
+        </p:nvSpPr>
+        <p:spPr>
+          <a:xfrm>
+            <a:off x="9290304" y="2532888"/>
+            <a:ext cx="2240280" cy="420624"/>
+          </a:xfrm>
+          <a:prstGeom prst="rect">
+            <a:avLst/>
+          </a:prstGeom>
+          <a:noFill/>
+          <a:ln/>
+        </p:spPr>
+        <p:txBody>
+          <a:bodyPr wrap="square" lIns="0" tIns="0" rIns="0" bIns="0" rtlCol="0" anchor="t"/>
+          <a:lstStyle/>
+          <a:p>
+            <a:pPr algn="ctr" indent="0" marL="0">
+              <a:buNone/>
+            </a:pPr>
+            <a:r>
+              <a:rPr lang="en-US" sz="1050" dirty="0">
+                <a:solidFill>
+                  <a:srgbClr val="344054"/>
+                </a:solidFill>
+                <a:latin typeface="Aptos" pitchFamily="34" charset="0"/>
+                <a:ea typeface="Aptos" pitchFamily="34" charset="-122"/>
+                <a:cs typeface="Aptos" pitchFamily="34" charset="-120"/>
+              </a:rPr>
+              <a:t>spend the remaining budget</a:t>
+            </a:r>
+            <a:endParaRPr lang="en-US" sz="1050" dirty="0"/>
+          </a:p>
+        </p:txBody>
+      </p:sp>
+      <p:sp>
+        <p:nvSpPr>
+          <p:cNvPr id="23" name="Text 21"/>
+          <p:cNvSpPr/>
+          <p:nvPr/>
+        </p:nvSpPr>
+        <p:spPr>
+          <a:xfrm>
+            <a:off x="621792" y="3145536"/>
+            <a:ext cx="5212080" cy="219456"/>
+          </a:xfrm>
+          <a:prstGeom prst="rect">
+            <a:avLst/>
+          </a:prstGeom>
+          <a:noFill/>
+          <a:ln/>
+        </p:spPr>
+        <p:txBody>
+          <a:bodyPr wrap="square" lIns="0" tIns="0" rIns="0" bIns="0" rtlCol="0" anchor="t"/>
+          <a:lstStyle/>
+          <a:p>
+            <a:pPr indent="0" marL="0">
+              <a:buNone/>
+            </a:pPr>
+            <a:r>
+              <a:rPr lang="en-US" sz="1000" b="1" dirty="0">
+                <a:solidFill>
+                  <a:srgbClr val="003B95"/>
+                </a:solidFill>
+                <a:latin typeface="Aptos" pitchFamily="34" charset="0"/>
+                <a:ea typeface="Aptos" pitchFamily="34" charset="-122"/>
+                <a:cs typeface="Aptos" pitchFamily="34" charset="-120"/>
+              </a:rPr>
+              <a:t>COLLECTOR CAPABILITIES NOW</a:t>
+            </a:r>
+            <a:endParaRPr lang="en-US" sz="1000" dirty="0"/>
+          </a:p>
+        </p:txBody>
+      </p:sp>
+      <p:sp>
+        <p:nvSpPr>
+          <p:cNvPr id="24" name="Shape 22"/>
+          <p:cNvSpPr/>
+          <p:nvPr/>
+        </p:nvSpPr>
+        <p:spPr>
+          <a:xfrm>
+            <a:off x="621792" y="3493008"/>
+            <a:ext cx="5212080" cy="0"/>
+          </a:xfrm>
+          <a:prstGeom prst="line">
+            <a:avLst/>
+          </a:prstGeom>
+          <a:noFill/>
+          <a:ln w="20320">
+            <a:solidFill>
+              <a:srgbClr val="003B95"/>
+            </a:solidFill>
+            <a:prstDash val="solid"/>
+          </a:ln>
+        </p:spPr>
+      </p:sp>
+      <p:sp>
+        <p:nvSpPr>
+          <p:cNvPr id="25" name="Text 23"/>
+          <p:cNvSpPr/>
+          <p:nvPr/>
+        </p:nvSpPr>
+        <p:spPr>
+          <a:xfrm>
+            <a:off x="621792" y="3675888"/>
+            <a:ext cx="5212080" cy="749808"/>
+          </a:xfrm>
+          <a:prstGeom prst="rect">
+            <a:avLst/>
+          </a:prstGeom>
+          <a:noFill/>
+          <a:ln/>
+        </p:spPr>
+        <p:txBody>
+          <a:bodyPr wrap="square" lIns="0" tIns="0" rIns="0" bIns="0" rtlCol="0" anchor="t"/>
+          <a:lstStyle/>
+          <a:p>
+            <a:pPr indent="0" marL="0">
+              <a:buNone/>
+            </a:pPr>
+            <a:r>
+              <a:rPr lang="en-US" sz="1150" dirty="0">
+                <a:solidFill>
+                  <a:srgbClr val="344054"/>
+                </a:solidFill>
+                <a:latin typeface="Aptos" pitchFamily="34" charset="0"/>
+                <a:ea typeface="Aptos" pitchFamily="34" charset="-122"/>
+                <a:cs typeface="Aptos" pitchFamily="34" charset="-120"/>
+              </a:rPr>
+              <a:t>Pinned revisions, canonical matrix records, full computed spectra, and explicit coverage.</a:t>
+            </a:r>
+            <a:endParaRPr lang="en-US" sz="1150" dirty="0"/>
+          </a:p>
+          <a:p>
+            <a:pPr indent="0" marL="0">
+              <a:buNone/>
+            </a:pPr>
+            <a:r>
+              <a:rPr lang="en-US" sz="1150" dirty="0">
+                <a:solidFill>
+                  <a:srgbClr val="344054"/>
+                </a:solidFill>
+                <a:latin typeface="Aptos" pitchFamily="34" charset="0"/>
+                <a:ea typeface="Aptos" pitchFamily="34" charset="-122"/>
+                <a:cs typeface="Aptos" pitchFamily="34" charset="-120"/>
+              </a:rPr>
+              <a:t>New records still need verified benchmark joins and prediction experiments.</a:t>
+            </a:r>
+            <a:endParaRPr lang="en-US" sz="1150" dirty="0"/>
+          </a:p>
+        </p:txBody>
+      </p:sp>
+      <p:sp>
+        <p:nvSpPr>
+          <p:cNvPr id="26" name="Text 24"/>
+          <p:cNvSpPr/>
+          <p:nvPr/>
+        </p:nvSpPr>
+        <p:spPr>
+          <a:xfrm>
+            <a:off x="6419088" y="3145536"/>
+            <a:ext cx="5148072" cy="219456"/>
+          </a:xfrm>
+          <a:prstGeom prst="rect">
+            <a:avLst/>
+          </a:prstGeom>
+          <a:noFill/>
+          <a:ln/>
+        </p:spPr>
+        <p:txBody>
+          <a:bodyPr wrap="square" lIns="0" tIns="0" rIns="0" bIns="0" rtlCol="0" anchor="t"/>
+          <a:lstStyle/>
+          <a:p>
+            <a:pPr indent="0" marL="0">
+              <a:buNone/>
+            </a:pPr>
+            <a:r>
+              <a:rPr lang="en-US" sz="1000" b="1" dirty="0">
+                <a:solidFill>
+                  <a:srgbClr val="00693E"/>
+                </a:solidFill>
+                <a:latin typeface="Aptos" pitchFamily="34" charset="0"/>
+                <a:ea typeface="Aptos" pitchFamily="34" charset="-122"/>
+                <a:cs typeface="Aptos" pitchFamily="34" charset="-120"/>
+              </a:rPr>
+              <a:t>PROPOSED EVIDENCE COMPARISON</a:t>
+            </a:r>
+            <a:endParaRPr lang="en-US" sz="1000" dirty="0"/>
+          </a:p>
+        </p:txBody>
+      </p:sp>
+      <p:sp>
+        <p:nvSpPr>
+          <p:cNvPr id="27" name="Shape 25"/>
+          <p:cNvSpPr/>
+          <p:nvPr/>
+        </p:nvSpPr>
+        <p:spPr>
+          <a:xfrm>
+            <a:off x="6419088" y="3493008"/>
+            <a:ext cx="5148072" cy="0"/>
+          </a:xfrm>
+          <a:prstGeom prst="line">
+            <a:avLst/>
+          </a:prstGeom>
+          <a:noFill/>
+          <a:ln w="20320">
+            <a:solidFill>
+              <a:srgbClr val="00693E"/>
+            </a:solidFill>
+            <a:prstDash val="solid"/>
+          </a:ln>
+        </p:spPr>
+      </p:sp>
+      <p:sp>
+        <p:nvSpPr>
+          <p:cNvPr id="28" name="Text 26"/>
+          <p:cNvSpPr/>
+          <p:nvPr/>
+        </p:nvSpPr>
+        <p:spPr>
+          <a:xfrm>
+            <a:off x="6419088" y="3675888"/>
+            <a:ext cx="5148072" cy="749808"/>
+          </a:xfrm>
+          <a:prstGeom prst="rect">
+            <a:avLst/>
+          </a:prstGeom>
+          <a:noFill/>
+          <a:ln/>
+        </p:spPr>
+        <p:txBody>
+          <a:bodyPr wrap="square" lIns="0" tIns="0" rIns="0" bIns="0" rtlCol="0" anchor="t"/>
+          <a:lstStyle/>
+          <a:p>
+            <a:pPr indent="0" marL="0">
+              <a:buNone/>
+            </a:pPr>
+            <a:r>
+              <a:rPr lang="en-US" sz="1150" dirty="0">
+                <a:solidFill>
+                  <a:srgbClr val="344054"/>
+                </a:solidFill>
+                <a:latin typeface="Aptos" pitchFamily="34" charset="0"/>
+                <a:ea typeface="Aptos" pitchFamily="34" charset="-122"/>
+                <a:cs typeface="Aptos" pitchFamily="34" charset="-120"/>
+              </a:rPr>
+              <a:t>Scientific track: weights plus training scores.</a:t>
+            </a:r>
+            <a:endParaRPr lang="en-US" sz="1150" dirty="0"/>
+          </a:p>
+          <a:p>
+            <a:pPr indent="0" marL="0">
+              <a:buNone/>
+            </a:pPr>
+            <a:r>
+              <a:rPr lang="en-US" sz="1150" dirty="0">
+                <a:solidFill>
+                  <a:srgbClr val="344054"/>
+                </a:solidFill>
+                <a:latin typeface="Aptos" pitchFamily="34" charset="0"/>
+                <a:ea typeface="Aptos" pitchFamily="34" charset="-122"/>
+                <a:cs typeface="Aptos" pitchFamily="34" charset="-120"/>
+              </a:rPr>
+              <a:t>Practical track: documentation, historical scores, and weights.</a:t>
+            </a:r>
+            <a:endParaRPr lang="en-US" sz="1150" dirty="0"/>
+          </a:p>
+          <a:p>
+            <a:pPr indent="0" marL="0">
+              <a:buNone/>
+            </a:pPr>
+            <a:r>
+              <a:rPr lang="en-US" sz="1150" dirty="0">
+                <a:solidFill>
+                  <a:srgbClr val="344054"/>
+                </a:solidFill>
+                <a:latin typeface="Aptos" pitchFamily="34" charset="0"/>
+                <a:ea typeface="Aptos" pitchFamily="34" charset="-122"/>
+                <a:cs typeface="Aptos" pitchFamily="34" charset="-120"/>
+              </a:rPr>
+              <a:t>Test new roots, tasks, and future releases.</a:t>
+            </a:r>
+            <a:endParaRPr lang="en-US" sz="1150" dirty="0"/>
+          </a:p>
+        </p:txBody>
+      </p:sp>
+      <p:sp>
+        <p:nvSpPr>
+          <p:cNvPr id="29" name="Text 27"/>
+          <p:cNvSpPr/>
+          <p:nvPr/>
+        </p:nvSpPr>
+        <p:spPr>
+          <a:xfrm>
+            <a:off x="621792" y="4718304"/>
+            <a:ext cx="10954512" cy="219456"/>
+          </a:xfrm>
+          <a:prstGeom prst="rect">
+            <a:avLst/>
+          </a:prstGeom>
+          <a:noFill/>
+          <a:ln/>
+        </p:spPr>
+        <p:txBody>
+          <a:bodyPr wrap="square" lIns="0" tIns="0" rIns="0" bIns="0" rtlCol="0" anchor="t"/>
+          <a:lstStyle/>
+          <a:p>
+            <a:pPr indent="0" marL="0">
+              <a:buNone/>
+            </a:pPr>
+            <a:r>
+              <a:rPr lang="en-US" sz="1000" b="1" dirty="0">
+                <a:solidFill>
+                  <a:srgbClr val="667085"/>
+                </a:solidFill>
+                <a:latin typeface="Aptos" pitchFamily="34" charset="0"/>
+                <a:ea typeface="Aptos" pitchFamily="34" charset="-122"/>
+                <a:cs typeface="Aptos" pitchFamily="34" charset="-120"/>
+              </a:rPr>
+              <a:t>PROPOSED COLLECTION MILESTONES</a:t>
+            </a:r>
+            <a:endParaRPr lang="en-US" sz="1000" dirty="0"/>
+          </a:p>
+        </p:txBody>
+      </p:sp>
+      <p:sp>
+        <p:nvSpPr>
+          <p:cNvPr id="30" name="Shape 28"/>
+          <p:cNvSpPr/>
+          <p:nvPr/>
+        </p:nvSpPr>
+        <p:spPr>
+          <a:xfrm>
+            <a:off x="786384" y="5175504"/>
+            <a:ext cx="10579608" cy="0"/>
+          </a:xfrm>
+          <a:prstGeom prst="line">
+            <a:avLst/>
+          </a:prstGeom>
+          <a:noFill/>
+          <a:ln w="25400">
+            <a:solidFill>
+              <a:srgbClr val="D9E2EC"/>
+            </a:solidFill>
+            <a:prstDash val="solid"/>
+          </a:ln>
+        </p:spPr>
+      </p:sp>
+      <p:sp>
+        <p:nvSpPr>
+          <p:cNvPr id="31" name="Shape 29"/>
+          <p:cNvSpPr/>
+          <p:nvPr/>
+        </p:nvSpPr>
+        <p:spPr>
+          <a:xfrm>
+            <a:off x="731520" y="5120640"/>
+            <a:ext cx="109728" cy="109728"/>
+          </a:xfrm>
+          <a:prstGeom prst="ellipse">
+            <a:avLst/>
+          </a:prstGeom>
+          <a:solidFill>
+            <a:srgbClr val="003B95"/>
+          </a:solidFill>
+          <a:ln w="12700">
+            <a:solidFill>
+              <a:srgbClr val="333333">
+                <a:alpha val="0"/>
+              </a:srgbClr>
+            </a:solidFill>
+            <a:prstDash val="solid"/>
+          </a:ln>
+        </p:spPr>
+      </p:sp>
+      <p:sp>
+        <p:nvSpPr>
+          <p:cNvPr id="32" name="Text 30"/>
+          <p:cNvSpPr/>
+          <p:nvPr/>
+        </p:nvSpPr>
+        <p:spPr>
+          <a:xfrm>
+            <a:off x="621792" y="5449824"/>
+            <a:ext cx="3328416" cy="310896"/>
+          </a:xfrm>
+          <a:prstGeom prst="rect">
+            <a:avLst/>
+          </a:prstGeom>
+          <a:noFill/>
+          <a:ln/>
+        </p:spPr>
+        <p:txBody>
+          <a:bodyPr wrap="square" lIns="0" tIns="0" rIns="0" bIns="0" rtlCol="0" anchor="t"/>
+          <a:lstStyle/>
+          <a:p>
+            <a:pPr indent="0" marL="0">
+              <a:buNone/>
+            </a:pPr>
+            <a:r>
+              <a:rPr lang="en-US" sz="1600" b="1" dirty="0">
+                <a:solidFill>
+                  <a:srgbClr val="003B95"/>
+                </a:solidFill>
+                <a:latin typeface="Aptos" pitchFamily="34" charset="0"/>
+                <a:ea typeface="Aptos" pitchFamily="34" charset="-122"/>
+                <a:cs typeface="Aptos" pitchFamily="34" charset="-120"/>
+              </a:rPr>
+              <a:t>1k pinned artifacts</a:t>
+            </a:r>
+            <a:endParaRPr lang="en-US" sz="1600" dirty="0"/>
+          </a:p>
+        </p:txBody>
+      </p:sp>
+      <p:sp>
+        <p:nvSpPr>
+          <p:cNvPr id="33" name="Text 31"/>
+          <p:cNvSpPr/>
+          <p:nvPr/>
+        </p:nvSpPr>
+        <p:spPr>
+          <a:xfrm>
+            <a:off x="621792" y="5888736"/>
+            <a:ext cx="3328416" cy="347472"/>
+          </a:xfrm>
+          <a:prstGeom prst="rect">
+            <a:avLst/>
+          </a:prstGeom>
+          <a:noFill/>
+          <a:ln/>
+        </p:spPr>
+        <p:txBody>
+          <a:bodyPr wrap="square" lIns="0" tIns="0" rIns="0" bIns="0" rtlCol="0" anchor="t"/>
+          <a:lstStyle/>
+          <a:p>
+            <a:pPr indent="0" marL="0">
+              <a:buNone/>
+            </a:pPr>
+            <a:r>
+              <a:rPr lang="en-US" sz="1050" dirty="0">
+                <a:solidFill>
+                  <a:srgbClr val="344054"/>
+                </a:solidFill>
+                <a:latin typeface="Aptos" pitchFamily="34" charset="0"/>
+                <a:ea typeface="Aptos" pitchFamily="34" charset="-122"/>
+                <a:cs typeface="Aptos" pitchFamily="34" charset="-120"/>
+              </a:rPr>
+              <a:t>Measure collection cost and coverage</a:t>
+            </a:r>
+            <a:endParaRPr lang="en-US" sz="1050" dirty="0"/>
+          </a:p>
+        </p:txBody>
+      </p:sp>
+      <p:sp>
+        <p:nvSpPr>
+          <p:cNvPr id="34" name="Shape 32"/>
+          <p:cNvSpPr/>
+          <p:nvPr/>
+        </p:nvSpPr>
+        <p:spPr>
+          <a:xfrm>
+            <a:off x="4544568" y="5120640"/>
+            <a:ext cx="109728" cy="109728"/>
+          </a:xfrm>
+          <a:prstGeom prst="ellipse">
+            <a:avLst/>
+          </a:prstGeom>
+          <a:solidFill>
+            <a:srgbClr val="00693E"/>
+          </a:solidFill>
+          <a:ln w="12700">
+            <a:solidFill>
+              <a:srgbClr val="333333">
+                <a:alpha val="0"/>
+              </a:srgbClr>
+            </a:solidFill>
+            <a:prstDash val="solid"/>
+          </a:ln>
+        </p:spPr>
+      </p:sp>
+      <p:sp>
+        <p:nvSpPr>
+          <p:cNvPr id="35" name="Text 33"/>
+          <p:cNvSpPr/>
+          <p:nvPr/>
+        </p:nvSpPr>
+        <p:spPr>
+          <a:xfrm>
+            <a:off x="4434840" y="5449824"/>
+            <a:ext cx="3328416" cy="310896"/>
+          </a:xfrm>
+          <a:prstGeom prst="rect">
+            <a:avLst/>
+          </a:prstGeom>
+          <a:noFill/>
+          <a:ln/>
+        </p:spPr>
+        <p:txBody>
+          <a:bodyPr wrap="square" lIns="0" tIns="0" rIns="0" bIns="0" rtlCol="0" anchor="t"/>
+          <a:lstStyle/>
+          <a:p>
+            <a:pPr indent="0" marL="0">
+              <a:buNone/>
+            </a:pPr>
+            <a:r>
+              <a:rPr lang="en-US" sz="1600" b="1" dirty="0">
+                <a:solidFill>
+                  <a:srgbClr val="00693E"/>
+                </a:solidFill>
+                <a:latin typeface="Aptos" pitchFamily="34" charset="0"/>
+                <a:ea typeface="Aptos" pitchFamily="34" charset="-122"/>
+                <a:cs typeface="Aptos" pitchFamily="34" charset="-120"/>
+              </a:rPr>
+              <a:t>5k-10k measured</a:t>
+            </a:r>
+            <a:endParaRPr lang="en-US" sz="1600" dirty="0"/>
+          </a:p>
+        </p:txBody>
+      </p:sp>
+      <p:sp>
+        <p:nvSpPr>
+          <p:cNvPr id="36" name="Text 34"/>
+          <p:cNvSpPr/>
+          <p:nvPr/>
+        </p:nvSpPr>
+        <p:spPr>
+          <a:xfrm>
+            <a:off x="4434840" y="5888736"/>
+            <a:ext cx="3328416" cy="347472"/>
+          </a:xfrm>
+          <a:prstGeom prst="rect">
+            <a:avLst/>
+          </a:prstGeom>
+          <a:noFill/>
+          <a:ln/>
+        </p:spPr>
+        <p:txBody>
+          <a:bodyPr wrap="square" lIns="0" tIns="0" rIns="0" bIns="0" rtlCol="0" anchor="t"/>
+          <a:lstStyle/>
+          <a:p>
+            <a:pPr indent="0" marL="0">
+              <a:buNone/>
+            </a:pPr>
+            <a:r>
+              <a:rPr lang="en-US" sz="1050" dirty="0">
+                <a:solidFill>
+                  <a:srgbClr val="344054"/>
+                </a:solidFill>
+                <a:latin typeface="Aptos" pitchFamily="34" charset="0"/>
+                <a:ea typeface="Aptos" pitchFamily="34" charset="-122"/>
+                <a:cs typeface="Aptos" pitchFamily="34" charset="-120"/>
+              </a:rPr>
+              <a:t>Compare task choices and evidence</a:t>
+            </a:r>
+            <a:endParaRPr lang="en-US" sz="1050" dirty="0"/>
+          </a:p>
+        </p:txBody>
+      </p:sp>
+      <p:sp>
+        <p:nvSpPr>
+          <p:cNvPr id="37" name="Shape 35"/>
+          <p:cNvSpPr/>
+          <p:nvPr/>
+        </p:nvSpPr>
+        <p:spPr>
+          <a:xfrm>
+            <a:off x="8357616" y="5120640"/>
+            <a:ext cx="109728" cy="109728"/>
+          </a:xfrm>
+          <a:prstGeom prst="ellipse">
+            <a:avLst/>
+          </a:prstGeom>
+          <a:solidFill>
+            <a:srgbClr val="9A6A00"/>
+          </a:solidFill>
+          <a:ln w="12700">
+            <a:solidFill>
+              <a:srgbClr val="333333">
+                <a:alpha val="0"/>
+              </a:srgbClr>
+            </a:solidFill>
+            <a:prstDash val="solid"/>
+          </a:ln>
+        </p:spPr>
+      </p:sp>
+      <p:sp>
+        <p:nvSpPr>
+          <p:cNvPr id="38" name="Text 36"/>
+          <p:cNvSpPr/>
+          <p:nvPr/>
+        </p:nvSpPr>
+        <p:spPr>
+          <a:xfrm>
+            <a:off x="8247888" y="5449824"/>
+            <a:ext cx="3328416" cy="310896"/>
+          </a:xfrm>
+          <a:prstGeom prst="rect">
+            <a:avLst/>
+          </a:prstGeom>
+          <a:noFill/>
+          <a:ln/>
+        </p:spPr>
+        <p:txBody>
+          <a:bodyPr wrap="square" lIns="0" tIns="0" rIns="0" bIns="0" rtlCol="0" anchor="t"/>
+          <a:lstStyle/>
+          <a:p>
+            <a:pPr indent="0" marL="0">
+              <a:buNone/>
+            </a:pPr>
+            <a:r>
+              <a:rPr lang="en-US" sz="1600" b="1" dirty="0">
+                <a:solidFill>
+                  <a:srgbClr val="9A6A00"/>
+                </a:solidFill>
+                <a:latin typeface="Aptos" pitchFamily="34" charset="0"/>
+                <a:ea typeface="Aptos" pitchFamily="34" charset="-122"/>
+                <a:cs typeface="Aptos" pitchFamily="34" charset="-120"/>
+              </a:rPr>
+              <a:t>50k measured target</a:t>
+            </a:r>
+            <a:endParaRPr lang="en-US" sz="1600" dirty="0"/>
+          </a:p>
+        </p:txBody>
+      </p:sp>
+      <p:sp>
+        <p:nvSpPr>
+          <p:cNvPr id="39" name="Text 37"/>
+          <p:cNvSpPr/>
+          <p:nvPr/>
+        </p:nvSpPr>
+        <p:spPr>
+          <a:xfrm>
+            <a:off x="8247888" y="5888736"/>
+            <a:ext cx="3328416" cy="347472"/>
+          </a:xfrm>
+          <a:prstGeom prst="rect">
+            <a:avLst/>
+          </a:prstGeom>
+          <a:noFill/>
+          <a:ln/>
+        </p:spPr>
+        <p:txBody>
+          <a:bodyPr wrap="square" lIns="0" tIns="0" rIns="0" bIns="0" rtlCol="0" anchor="t"/>
+          <a:lstStyle/>
+          <a:p>
+            <a:pPr indent="0" marL="0">
+              <a:buNone/>
+            </a:pPr>
+            <a:r>
+              <a:rPr lang="en-US" sz="1050" dirty="0">
+                <a:solidFill>
+                  <a:srgbClr val="344054"/>
+                </a:solidFill>
+                <a:latin typeface="Aptos" pitchFamily="34" charset="0"/>
+                <a:ea typeface="Aptos" pitchFamily="34" charset="-122"/>
+                <a:cs typeface="Aptos" pitchFamily="34" charset="-120"/>
+              </a:rPr>
+              <a:t>Release the zoo and benchmark</a:t>
+            </a:r>
+            <a:endParaRPr lang="en-US" sz="1050" dirty="0"/>
+          </a:p>
+        </p:txBody>
+      </p:sp>
+    </p:spTree>
+  </p:cSld>
+  <p:clrMapOvr>
+    <a:masterClrMapping/>
+  </p:clrMapOvr>
+</p:sld>
+</file>
+
 <file path=ppt/slides/slide3.xml><?xml version="1.0" encoding="utf-8"?>
 <p:sld xmlns:a="http://schemas.openxmlformats.org/drawingml/2006/main" xmlns:r="http://schemas.openxmlformats.org/officeDocument/2006/relationships" xmlns:p="http://schemas.openxmlformats.org/presentationml/2006/main">
   <p:cSld name="Slide 3">
@@ -24445,7 +26074,7 @@
                 <a:ea typeface="Aptos Display" pitchFamily="34" charset="-122"/>
                 <a:cs typeface="Aptos Display" pitchFamily="34" charset="-120"/>
               </a:rPr>
-              <a:t>Role coverage and all-matrix coverage answer different questions</a:t>
+              <a:t>How much of the collection can layer-wise grouping cover?</a:t>
             </a:r>
             <a:endParaRPr lang="en-US" sz="2500" dirty="0"/>
           </a:p>
@@ -24530,7 +26159,7 @@
                 <a:ea typeface="Aptos" pitchFamily="34" charset="-122"/>
                 <a:cs typeface="Aptos" pitchFamily="34" charset="-120"/>
               </a:rPr>
-              <a:t>Sources: parent population_ledger.csv; reassessment_0063666fd5733b453c38/metadata.json and all_matrix_cluster_validation.csv</a:t>
+              <a:t>Sources: weight_only_2a5abfeb98dc33d9662c/population_ledger.csv; retained combined-study provenance.json</a:t>
             </a:r>
             <a:endParaRPr lang="en-US" sz="660" dirty="0"/>
           </a:p>
@@ -24591,8 +26220,8 @@
         </p:blipFill>
         <p:spPr>
           <a:xfrm>
-            <a:off x="475488" y="1999781"/>
-            <a:ext cx="7360920" cy="3343070"/>
+            <a:off x="384048" y="1866779"/>
+            <a:ext cx="7333488" cy="3709658"/>
           </a:xfrm>
           <a:prstGeom prst="rect">
             <a:avLst/>
@@ -24607,8 +26236,8 @@
         </p:nvSpPr>
         <p:spPr>
           <a:xfrm>
-            <a:off x="8156448" y="1252728"/>
-            <a:ext cx="2651760" cy="438912"/>
+            <a:off x="8092440" y="1298448"/>
+            <a:ext cx="2743200" cy="438912"/>
           </a:xfrm>
           <a:prstGeom prst="rect">
             <a:avLst/>
@@ -24626,13 +26255,13 @@
             <a:r>
               <a:rPr lang="en-US" sz="2700" b="1" dirty="0">
                 <a:solidFill>
-                  <a:srgbClr val="002676"/>
+                  <a:srgbClr val="003B95"/>
                 </a:solidFill>
                 <a:latin typeface="Aptos Display" pitchFamily="34" charset="0"/>
                 <a:ea typeface="Aptos Display" pitchFamily="34" charset="-122"/>
                 <a:cs typeface="Aptos Display" pitchFamily="34" charset="-120"/>
               </a:rPr>
-              <a:t>10,431</a:t>
+              <a:t>10,946</a:t>
             </a:r>
             <a:endParaRPr lang="en-US" sz="2700" dirty="0"/>
           </a:p>
@@ -24646,8 +26275,8 @@
         </p:nvSpPr>
         <p:spPr>
           <a:xfrm>
-            <a:off x="8156448" y="1737360"/>
-            <a:ext cx="2651760" cy="292608"/>
+            <a:off x="8092440" y="1783080"/>
+            <a:ext cx="2743200" cy="292608"/>
           </a:xfrm>
           <a:prstGeom prst="rect">
             <a:avLst/>
@@ -24671,7 +26300,7 @@
                 <a:ea typeface="Aptos" pitchFamily="34" charset="-122"/>
                 <a:cs typeface="Aptos" pitchFamily="34" charset="-120"/>
               </a:rPr>
-              <a:t>strict seven-role core</a:t>
+              <a:t>grouped models</a:t>
             </a:r>
             <a:endParaRPr lang="en-US" sz="1050" dirty="0"/>
           </a:p>
@@ -24685,8 +26314,8 @@
         </p:nvSpPr>
         <p:spPr>
           <a:xfrm>
-            <a:off x="8156448" y="2395728"/>
-            <a:ext cx="2651760" cy="438912"/>
+            <a:off x="8092440" y="2450592"/>
+            <a:ext cx="2743200" cy="438912"/>
           </a:xfrm>
           <a:prstGeom prst="rect">
             <a:avLst/>
@@ -24704,13 +26333,13 @@
             <a:r>
               <a:rPr lang="en-US" sz="2700" b="1" dirty="0">
                 <a:solidFill>
-                  <a:srgbClr val="003B95"/>
+                  <a:srgbClr val="00693E"/>
                 </a:solidFill>
                 <a:latin typeface="Aptos Display" pitchFamily="34" charset="0"/>
                 <a:ea typeface="Aptos Display" pitchFamily="34" charset="-122"/>
                 <a:cs typeface="Aptos Display" pitchFamily="34" charset="-120"/>
               </a:rPr>
-              <a:t>10,946</a:t>
+              <a:t>87.2%</a:t>
             </a:r>
             <a:endParaRPr lang="en-US" sz="2700" dirty="0"/>
           </a:p>
@@ -24724,8 +26353,8 @@
         </p:nvSpPr>
         <p:spPr>
           <a:xfrm>
-            <a:off x="8156448" y="2880360"/>
-            <a:ext cx="2651760" cy="292608"/>
+            <a:off x="8092440" y="2935224"/>
+            <a:ext cx="2743200" cy="292608"/>
           </a:xfrm>
           <a:prstGeom prst="rect">
             <a:avLst/>
@@ -24749,7 +26378,7 @@
                 <a:ea typeface="Aptos" pitchFamily="34" charset="-122"/>
                 <a:cs typeface="Aptos" pitchFamily="34" charset="-120"/>
               </a:rPr>
-              <a:t>lineage assignments</a:t>
+              <a:t>of analyzed models</a:t>
             </a:r>
             <a:endParaRPr lang="en-US" sz="1050" dirty="0"/>
           </a:p>
@@ -24763,8 +26392,8 @@
         </p:nvSpPr>
         <p:spPr>
           <a:xfrm>
-            <a:off x="8156448" y="3538728"/>
-            <a:ext cx="2468880" cy="438912"/>
+            <a:off x="8092440" y="3273552"/>
+            <a:ext cx="2743200" cy="365760"/>
           </a:xfrm>
           <a:prstGeom prst="rect">
             <a:avLst/>
@@ -24780,15 +26409,54 @@
               <a:buNone/>
             </a:pPr>
             <a:r>
+              <a:rPr lang="en-US" sz="840" dirty="0">
+                <a:solidFill>
+                  <a:srgbClr val="667085"/>
+                </a:solidFill>
+                <a:latin typeface="Aptos" pitchFamily="34" charset="0"/>
+                <a:ea typeface="Aptos" pitchFamily="34" charset="-122"/>
+                <a:cs typeface="Aptos" pitchFamily="34" charset="-120"/>
+              </a:rPr>
+              <a:t>10,946 / 12,553</a:t>
+            </a:r>
+            <a:endParaRPr lang="en-US" sz="840" dirty="0"/>
+          </a:p>
+        </p:txBody>
+      </p:sp>
+      <p:sp>
+        <p:nvSpPr>
+          <p:cNvPr id="17" name="Text 14"/>
+          <p:cNvSpPr/>
+          <p:nvPr/>
+        </p:nvSpPr>
+        <p:spPr>
+          <a:xfrm>
+            <a:off x="8092440" y="3648456"/>
+            <a:ext cx="2743200" cy="438912"/>
+          </a:xfrm>
+          <a:prstGeom prst="rect">
+            <a:avLst/>
+          </a:prstGeom>
+          <a:noFill/>
+          <a:ln/>
+        </p:spPr>
+        <p:txBody>
+          <a:bodyPr wrap="square" lIns="0" tIns="0" rIns="0" bIns="0" rtlCol="0" anchor="t"/>
+          <a:lstStyle/>
+          <a:p>
+            <a:pPr indent="0" marL="0">
+              <a:buNone/>
+            </a:pPr>
+            <a:r>
               <a:rPr lang="en-US" sz="2700" b="1" dirty="0">
                 <a:solidFill>
-                  <a:srgbClr val="00693E"/>
+                  <a:srgbClr val="002676"/>
                 </a:solidFill>
                 <a:latin typeface="Aptos Display" pitchFamily="34" charset="0"/>
                 <a:ea typeface="Aptos Display" pitchFamily="34" charset="-122"/>
                 <a:cs typeface="Aptos Display" pitchFamily="34" charset="-120"/>
               </a:rPr>
-              <a:t>12,365</a:t>
+              <a:t>55.5%</a:t>
             </a:r>
             <a:endParaRPr lang="en-US" sz="2700" dirty="0"/>
           </a:p>
@@ -24796,14 +26464,14 @@
       </p:sp>
       <p:sp>
         <p:nvSpPr>
-          <p:cNvPr id="17" name="Text 14"/>
-          <p:cNvSpPr/>
-          <p:nvPr/>
-        </p:nvSpPr>
-        <p:spPr>
-          <a:xfrm>
-            <a:off x="8156448" y="4023360"/>
-            <a:ext cx="2468880" cy="292608"/>
+          <p:cNvPr id="18" name="Text 15"/>
+          <p:cNvSpPr/>
+          <p:nvPr/>
+        </p:nvSpPr>
+        <p:spPr>
+          <a:xfrm>
+            <a:off x="8092440" y="4133088"/>
+            <a:ext cx="2743200" cy="292608"/>
           </a:xfrm>
           <a:prstGeom prst="rect">
             <a:avLst/>
@@ -24827,7 +26495,7 @@
                 <a:ea typeface="Aptos" pitchFamily="34" charset="-122"/>
                 <a:cs typeface="Aptos" pitchFamily="34" charset="-120"/>
               </a:rPr>
-              <a:t>all-matrix alpha eligible</a:t>
+              <a:t>of selected records</a:t>
             </a:r>
             <a:endParaRPr lang="en-US" sz="1050" dirty="0"/>
           </a:p>
@@ -24835,18 +26503,57 @@
       </p:sp>
       <p:sp>
         <p:nvSpPr>
-          <p:cNvPr id="18" name="Text 15"/>
-          <p:cNvSpPr/>
-          <p:nvPr/>
-        </p:nvSpPr>
-        <p:spPr>
-          <a:xfrm>
-            <a:off x="8065008" y="4828032"/>
-            <a:ext cx="3154680" cy="941832"/>
+          <p:cNvPr id="19" name="Text 16"/>
+          <p:cNvSpPr/>
+          <p:nvPr/>
+        </p:nvSpPr>
+        <p:spPr>
+          <a:xfrm>
+            <a:off x="8092440" y="4471416"/>
+            <a:ext cx="2743200" cy="365760"/>
+          </a:xfrm>
+          <a:prstGeom prst="rect">
+            <a:avLst/>
+          </a:prstGeom>
+          <a:noFill/>
+          <a:ln/>
+        </p:spPr>
+        <p:txBody>
+          <a:bodyPr wrap="square" lIns="0" tIns="0" rIns="0" bIns="0" rtlCol="0" anchor="t"/>
+          <a:lstStyle/>
+          <a:p>
+            <a:pPr indent="0" marL="0">
+              <a:buNone/>
+            </a:pPr>
+            <a:r>
+              <a:rPr lang="en-US" sz="840" dirty="0">
+                <a:solidFill>
+                  <a:srgbClr val="667085"/>
+                </a:solidFill>
+                <a:latin typeface="Aptos" pitchFamily="34" charset="0"/>
+                <a:ea typeface="Aptos" pitchFamily="34" charset="-122"/>
+                <a:cs typeface="Aptos" pitchFamily="34" charset="-120"/>
+              </a:rPr>
+              <a:t>10,946 / 19,713</a:t>
+            </a:r>
+            <a:endParaRPr lang="en-US" sz="840" dirty="0"/>
+          </a:p>
+        </p:txBody>
+      </p:sp>
+      <p:sp>
+        <p:nvSpPr>
+          <p:cNvPr id="20" name="Text 17"/>
+          <p:cNvSpPr/>
+          <p:nvPr/>
+        </p:nvSpPr>
+        <p:spPr>
+          <a:xfrm>
+            <a:off x="8065008" y="4992624"/>
+            <a:ext cx="3246120" cy="1051560"/>
           </a:xfrm>
           <a:prstGeom prst="roundRect">
             <a:avLst>
-              <a:gd name="adj" fmla="val 4854"/>
+              <a:gd name="adj" fmla="val 4348"/>
             </a:avLst>
           </a:prstGeom>
           <a:solidFill>
@@ -24874,7 +26581,7 @@
                 <a:ea typeface="Aptos" pitchFamily="34" charset="-122"/>
                 <a:cs typeface="Aptos" pitchFamily="34" charset="-120"/>
               </a:rPr>
-              <a:t>Broader eligibility does not imply better grouping. All-matrix family ARI 0.258 vs rank 0.913 on human-reviewed labels; populations differ.</a:t>
+              <a:t>Fixed seven-role vocabulary; only tested missing-role patterns are admitted. 7,160 selected records have no completed analysis. Unseen-architecture accuracy remains untested.</a:t>
             </a:r>
             <a:endParaRPr lang="en-US" sz="1050" dirty="0"/>
           </a:p>
